--- a/presentation/RTL REBELS.pptx
+++ b/presentation/RTL REBELS.pptx
@@ -7,35 +7,30 @@
   <p:sldIdLst>
     <p:sldId id="256" r:id="rId2"/>
     <p:sldId id="257" r:id="rId3"/>
-    <p:sldId id="258" r:id="rId4"/>
-    <p:sldId id="259" r:id="rId5"/>
+    <p:sldId id="264" r:id="rId4"/>
+    <p:sldId id="265" r:id="rId5"/>
     <p:sldId id="260" r:id="rId6"/>
     <p:sldId id="261" r:id="rId7"/>
     <p:sldId id="262" r:id="rId8"/>
-    <p:sldId id="263" r:id="rId9"/>
   </p:sldIdLst>
   <p:sldSz cx="18288000" cy="10287000"/>
   <p:notesSz cx="6858000" cy="9144000"/>
   <p:embeddedFontLst>
     <p:embeddedFont>
       <p:font typeface="Canva Sans Bold" panose="020B0604020202020204" charset="0"/>
+      <p:regular r:id="rId9"/>
+    </p:embeddedFont>
+    <p:embeddedFont>
+      <p:font typeface="Horizon" panose="020B0604020202020204" charset="0"/>
       <p:regular r:id="rId10"/>
     </p:embeddedFont>
     <p:embeddedFont>
-      <p:font typeface="Horizon" panose="020B0604020202020204" charset="0"/>
+      <p:font typeface="Times New Roman MT" panose="020B0604020202020204" charset="0"/>
       <p:regular r:id="rId11"/>
     </p:embeddedFont>
     <p:embeddedFont>
-      <p:font typeface="Times New Roman MT" panose="020B0604020202020204" charset="0"/>
+      <p:font typeface="Times New Roman MT Bold" panose="020B0604020202020204" charset="0"/>
       <p:regular r:id="rId12"/>
-    </p:embeddedFont>
-    <p:embeddedFont>
-      <p:font typeface="Times New Roman MT Bold" panose="020B0604020202020204" charset="0"/>
-      <p:regular r:id="rId13"/>
-    </p:embeddedFont>
-    <p:embeddedFont>
-      <p:font typeface="TS Qamus Bold" panose="020B0604020202020204" charset="-78"/>
-      <p:regular r:id="rId14"/>
     </p:embeddedFont>
   </p:embeddedFontLst>
   <p:defaultTextStyle>
@@ -155,7 +150,7 @@
 <file path=ppt/revisionInfo.xml><?xml version="1.0" encoding="utf-8"?>
 <p1510:revInfo xmlns:a="http://schemas.openxmlformats.org/drawingml/2006/main" xmlns:r="http://schemas.openxmlformats.org/officeDocument/2006/relationships" xmlns:p1510="http://schemas.microsoft.com/office/powerpoint/2015/10/main">
   <p1510:revLst>
-    <p1510:client id="{5A7E20A9-CAA7-44CE-8686-D075D4D93C33}" v="38" dt="2026-08-28T13:08:50.406"/>
+    <p1510:client id="{5A7E20A9-CAA7-44CE-8686-D075D4D93C33}" v="64" dt="2026-08-29T04:22:03.300"/>
   </p1510:revLst>
 </p1510:revInfo>
 </file>
@@ -164,13 +159,13 @@
 <pc:chgInfo xmlns:a="http://schemas.openxmlformats.org/drawingml/2006/main" xmlns:r="http://schemas.openxmlformats.org/officeDocument/2006/relationships" xmlns:ac="http://schemas.microsoft.com/office/drawing/2013/main/command" xmlns:pc="http://schemas.microsoft.com/office/powerpoint/2013/main/command">
   <pc:docChgLst>
     <pc:chgData name="hp hp" userId="c106d3f60ba7ea1e" providerId="LiveId" clId="{8675EC9B-3D11-4CB5-A949-4C74E4654834}"/>
-    <pc:docChg chg="undo custSel modSld">
-      <pc:chgData name="hp hp" userId="c106d3f60ba7ea1e" providerId="LiveId" clId="{8675EC9B-3D11-4CB5-A949-4C74E4654834}" dt="2026-08-28T13:09:17.815" v="3825" actId="20577"/>
+    <pc:docChg chg="undo redo custSel addSld delSld modSld">
+      <pc:chgData name="hp hp" userId="c106d3f60ba7ea1e" providerId="LiveId" clId="{8675EC9B-3D11-4CB5-A949-4C74E4654834}" dt="2026-08-29T04:23:08.013" v="4373" actId="113"/>
       <pc:docMkLst>
         <pc:docMk/>
       </pc:docMkLst>
       <pc:sldChg chg="addSp delSp modSp mod">
-        <pc:chgData name="hp hp" userId="c106d3f60ba7ea1e" providerId="LiveId" clId="{8675EC9B-3D11-4CB5-A949-4C74E4654834}" dt="2026-08-28T12:56:53.538" v="3687" actId="20577"/>
+        <pc:chgData name="hp hp" userId="c106d3f60ba7ea1e" providerId="LiveId" clId="{8675EC9B-3D11-4CB5-A949-4C74E4654834}" dt="2026-08-29T03:12:50.270" v="3828" actId="20577"/>
         <pc:sldMkLst>
           <pc:docMk/>
           <pc:sldMk cId="0" sldId="256"/>
@@ -184,7 +179,7 @@
           </ac:spMkLst>
         </pc:spChg>
         <pc:spChg chg="mod">
-          <ac:chgData name="hp hp" userId="c106d3f60ba7ea1e" providerId="LiveId" clId="{8675EC9B-3D11-4CB5-A949-4C74E4654834}" dt="2026-08-28T09:45:47.026" v="189" actId="14100"/>
+          <ac:chgData name="hp hp" userId="c106d3f60ba7ea1e" providerId="LiveId" clId="{8675EC9B-3D11-4CB5-A949-4C74E4654834}" dt="2026-08-29T03:12:50.270" v="3828" actId="20577"/>
           <ac:spMkLst>
             <pc:docMk/>
             <pc:sldMk cId="0" sldId="256"/>
@@ -225,7 +220,7 @@
         </pc:spChg>
       </pc:sldChg>
       <pc:sldChg chg="addSp delSp modSp mod">
-        <pc:chgData name="hp hp" userId="c106d3f60ba7ea1e" providerId="LiveId" clId="{8675EC9B-3D11-4CB5-A949-4C74E4654834}" dt="2026-08-28T10:40:41.921" v="1647" actId="20577"/>
+        <pc:chgData name="hp hp" userId="c106d3f60ba7ea1e" providerId="LiveId" clId="{8675EC9B-3D11-4CB5-A949-4C74E4654834}" dt="2026-08-29T04:06:01.235" v="4216" actId="12"/>
         <pc:sldMkLst>
           <pc:docMk/>
           <pc:sldMk cId="0" sldId="257"/>
@@ -239,7 +234,7 @@
           </ac:spMkLst>
         </pc:spChg>
         <pc:spChg chg="mod">
-          <ac:chgData name="hp hp" userId="c106d3f60ba7ea1e" providerId="LiveId" clId="{8675EC9B-3D11-4CB5-A949-4C74E4654834}" dt="2026-08-28T10:40:41.921" v="1647" actId="20577"/>
+          <ac:chgData name="hp hp" userId="c106d3f60ba7ea1e" providerId="LiveId" clId="{8675EC9B-3D11-4CB5-A949-4C74E4654834}" dt="2026-08-29T03:23:56.157" v="3840"/>
           <ac:spMkLst>
             <pc:docMk/>
             <pc:sldMk cId="0" sldId="257"/>
@@ -254,6 +249,14 @@
             <ac:spMk id="8" creationId="{00000000-0000-0000-0000-000000000000}"/>
           </ac:spMkLst>
         </pc:spChg>
+        <pc:spChg chg="add mod">
+          <ac:chgData name="hp hp" userId="c106d3f60ba7ea1e" providerId="LiveId" clId="{8675EC9B-3D11-4CB5-A949-4C74E4654834}" dt="2026-08-29T04:06:01.235" v="4216" actId="12"/>
+          <ac:spMkLst>
+            <pc:docMk/>
+            <pc:sldMk cId="0" sldId="257"/>
+            <ac:spMk id="10" creationId="{514E0D0C-FD81-EC44-6FB9-7FA79BFA4010}"/>
+          </ac:spMkLst>
+        </pc:spChg>
         <pc:graphicFrameChg chg="add del modGraphic">
           <ac:chgData name="hp hp" userId="c106d3f60ba7ea1e" providerId="LiveId" clId="{8675EC9B-3D11-4CB5-A949-4C74E4654834}" dt="2026-08-28T09:58:18.672" v="584" actId="3680"/>
           <ac:graphicFrameMkLst>
@@ -263,8 +266,8 @@
           </ac:graphicFrameMkLst>
         </pc:graphicFrameChg>
       </pc:sldChg>
-      <pc:sldChg chg="modSp mod">
-        <pc:chgData name="hp hp" userId="c106d3f60ba7ea1e" providerId="LiveId" clId="{8675EC9B-3D11-4CB5-A949-4C74E4654834}" dt="2026-08-28T10:43:24.159" v="1651" actId="20577"/>
+      <pc:sldChg chg="modSp del mod">
+        <pc:chgData name="hp hp" userId="c106d3f60ba7ea1e" providerId="LiveId" clId="{8675EC9B-3D11-4CB5-A949-4C74E4654834}" dt="2026-08-29T03:36:20.355" v="3934" actId="2696"/>
         <pc:sldMkLst>
           <pc:docMk/>
           <pc:sldMk cId="0" sldId="258"/>
@@ -278,8 +281,8 @@
           </ac:spMkLst>
         </pc:spChg>
       </pc:sldChg>
-      <pc:sldChg chg="addSp modSp mod">
-        <pc:chgData name="hp hp" userId="c106d3f60ba7ea1e" providerId="LiveId" clId="{8675EC9B-3D11-4CB5-A949-4C74E4654834}" dt="2026-08-28T11:04:12.290" v="1728" actId="14100"/>
+      <pc:sldChg chg="addSp modSp del mod">
+        <pc:chgData name="hp hp" userId="c106d3f60ba7ea1e" providerId="LiveId" clId="{8675EC9B-3D11-4CB5-A949-4C74E4654834}" dt="2026-08-29T03:42:03.793" v="3949" actId="2696"/>
         <pc:sldMkLst>
           <pc:docMk/>
           <pc:sldMk cId="0" sldId="259"/>
@@ -301,7 +304,7 @@
           </ac:spMkLst>
         </pc:spChg>
         <pc:picChg chg="add mod">
-          <ac:chgData name="hp hp" userId="c106d3f60ba7ea1e" providerId="LiveId" clId="{8675EC9B-3D11-4CB5-A949-4C74E4654834}" dt="2026-08-28T11:04:12.290" v="1728" actId="14100"/>
+          <ac:chgData name="hp hp" userId="c106d3f60ba7ea1e" providerId="LiveId" clId="{8675EC9B-3D11-4CB5-A949-4C74E4654834}" dt="2026-08-29T03:38:47.922" v="3937" actId="1076"/>
           <ac:picMkLst>
             <pc:docMk/>
             <pc:sldMk cId="0" sldId="259"/>
@@ -309,56 +312,120 @@
           </ac:picMkLst>
         </pc:picChg>
       </pc:sldChg>
-      <pc:sldChg chg="modSp mod">
-        <pc:chgData name="hp hp" userId="c106d3f60ba7ea1e" providerId="LiveId" clId="{8675EC9B-3D11-4CB5-A949-4C74E4654834}" dt="2026-08-28T11:21:33.278" v="2006" actId="12"/>
+      <pc:sldChg chg="addSp delSp modSp mod modClrScheme chgLayout">
+        <pc:chgData name="hp hp" userId="c106d3f60ba7ea1e" providerId="LiveId" clId="{8675EC9B-3D11-4CB5-A949-4C74E4654834}" dt="2026-08-29T04:23:08.013" v="4373" actId="113"/>
         <pc:sldMkLst>
           <pc:docMk/>
           <pc:sldMk cId="0" sldId="260"/>
         </pc:sldMkLst>
         <pc:spChg chg="mod">
-          <ac:chgData name="hp hp" userId="c106d3f60ba7ea1e" providerId="LiveId" clId="{8675EC9B-3D11-4CB5-A949-4C74E4654834}" dt="2026-08-28T11:21:33.278" v="2006" actId="12"/>
+          <ac:chgData name="hp hp" userId="c106d3f60ba7ea1e" providerId="LiveId" clId="{8675EC9B-3D11-4CB5-A949-4C74E4654834}" dt="2026-08-29T03:45:20.160" v="3990" actId="14100"/>
+          <ac:spMkLst>
+            <pc:docMk/>
+            <pc:sldMk cId="0" sldId="260"/>
+            <ac:spMk id="2" creationId="{00000000-0000-0000-0000-000000000000}"/>
+          </ac:spMkLst>
+        </pc:spChg>
+        <pc:spChg chg="mod">
+          <ac:chgData name="hp hp" userId="c106d3f60ba7ea1e" providerId="LiveId" clId="{8675EC9B-3D11-4CB5-A949-4C74E4654834}" dt="2026-08-29T03:45:14.547" v="3985" actId="1076"/>
           <ac:spMkLst>
             <pc:docMk/>
             <pc:sldMk cId="0" sldId="260"/>
             <ac:spMk id="10" creationId="{00000000-0000-0000-0000-000000000000}"/>
           </ac:spMkLst>
         </pc:spChg>
+        <pc:spChg chg="add mod">
+          <ac:chgData name="hp hp" userId="c106d3f60ba7ea1e" providerId="LiveId" clId="{8675EC9B-3D11-4CB5-A949-4C74E4654834}" dt="2026-08-29T03:45:18.910" v="3989" actId="767"/>
+          <ac:spMkLst>
+            <pc:docMk/>
+            <pc:sldMk cId="0" sldId="260"/>
+            <ac:spMk id="11" creationId="{DDCE1B7A-50F0-2449-5FE5-8D3CBE4BD9E8}"/>
+          </ac:spMkLst>
+        </pc:spChg>
+        <pc:spChg chg="add del mod">
+          <ac:chgData name="hp hp" userId="c106d3f60ba7ea1e" providerId="LiveId" clId="{8675EC9B-3D11-4CB5-A949-4C74E4654834}" dt="2026-08-29T03:45:13.743" v="3984" actId="767"/>
+          <ac:spMkLst>
+            <pc:docMk/>
+            <pc:sldMk cId="0" sldId="260"/>
+            <ac:spMk id="12" creationId="{0BC36698-3E03-3AE6-6E05-6B3B0B1868BF}"/>
+          </ac:spMkLst>
+        </pc:spChg>
+        <pc:spChg chg="add del mod">
+          <ac:chgData name="hp hp" userId="c106d3f60ba7ea1e" providerId="LiveId" clId="{8675EC9B-3D11-4CB5-A949-4C74E4654834}" dt="2026-08-29T03:45:11.427" v="3981" actId="767"/>
+          <ac:spMkLst>
+            <pc:docMk/>
+            <pc:sldMk cId="0" sldId="260"/>
+            <ac:spMk id="13" creationId="{FDA68985-5A79-4DE9-1C0B-46063E51AE17}"/>
+          </ac:spMkLst>
+        </pc:spChg>
+        <pc:spChg chg="add del mod ord">
+          <ac:chgData name="hp hp" userId="c106d3f60ba7ea1e" providerId="LiveId" clId="{8675EC9B-3D11-4CB5-A949-4C74E4654834}" dt="2026-08-29T03:45:08.296" v="3978" actId="700"/>
+          <ac:spMkLst>
+            <pc:docMk/>
+            <pc:sldMk cId="0" sldId="260"/>
+            <ac:spMk id="14" creationId="{42AADF48-004A-30F2-C003-E142BBD6ABA1}"/>
+          </ac:spMkLst>
+        </pc:spChg>
+        <pc:spChg chg="add mod">
+          <ac:chgData name="hp hp" userId="c106d3f60ba7ea1e" providerId="LiveId" clId="{8675EC9B-3D11-4CB5-A949-4C74E4654834}" dt="2026-08-29T04:23:08.013" v="4373" actId="113"/>
+          <ac:spMkLst>
+            <pc:docMk/>
+            <pc:sldMk cId="0" sldId="260"/>
+            <ac:spMk id="15" creationId="{5CA5C933-88E3-9968-6297-E6B43D7AA12B}"/>
+          </ac:spMkLst>
+        </pc:spChg>
       </pc:sldChg>
-      <pc:sldChg chg="modSp mod">
-        <pc:chgData name="hp hp" userId="c106d3f60ba7ea1e" providerId="LiveId" clId="{8675EC9B-3D11-4CB5-A949-4C74E4654834}" dt="2026-08-28T11:59:57.315" v="2824" actId="20577"/>
+      <pc:sldChg chg="addSp delSp modSp mod">
+        <pc:chgData name="hp hp" userId="c106d3f60ba7ea1e" providerId="LiveId" clId="{8675EC9B-3D11-4CB5-A949-4C74E4654834}" dt="2026-08-29T04:18:14.459" v="4289" actId="1076"/>
         <pc:sldMkLst>
           <pc:docMk/>
           <pc:sldMk cId="0" sldId="261"/>
         </pc:sldMkLst>
         <pc:spChg chg="mod">
-          <ac:chgData name="hp hp" userId="c106d3f60ba7ea1e" providerId="LiveId" clId="{8675EC9B-3D11-4CB5-A949-4C74E4654834}" dt="2026-08-28T11:39:23.535" v="2359" actId="782"/>
+          <ac:chgData name="hp hp" userId="c106d3f60ba7ea1e" providerId="LiveId" clId="{8675EC9B-3D11-4CB5-A949-4C74E4654834}" dt="2026-08-29T03:55:37.028" v="4054" actId="1076"/>
           <ac:spMkLst>
             <pc:docMk/>
             <pc:sldMk cId="0" sldId="261"/>
             <ac:spMk id="4" creationId="{00000000-0000-0000-0000-000000000000}"/>
           </ac:spMkLst>
         </pc:spChg>
-        <pc:spChg chg="mod">
-          <ac:chgData name="hp hp" userId="c106d3f60ba7ea1e" providerId="LiveId" clId="{8675EC9B-3D11-4CB5-A949-4C74E4654834}" dt="2026-08-28T11:59:57.315" v="2824" actId="20577"/>
+        <pc:spChg chg="del mod">
+          <ac:chgData name="hp hp" userId="c106d3f60ba7ea1e" providerId="LiveId" clId="{8675EC9B-3D11-4CB5-A949-4C74E4654834}" dt="2026-08-29T03:52:02.061" v="4025"/>
           <ac:spMkLst>
             <pc:docMk/>
             <pc:sldMk cId="0" sldId="261"/>
             <ac:spMk id="10" creationId="{00000000-0000-0000-0000-000000000000}"/>
           </ac:spMkLst>
         </pc:spChg>
+        <pc:spChg chg="add mod">
+          <ac:chgData name="hp hp" userId="c106d3f60ba7ea1e" providerId="LiveId" clId="{8675EC9B-3D11-4CB5-A949-4C74E4654834}" dt="2026-08-29T04:18:14.459" v="4289" actId="1076"/>
+          <ac:spMkLst>
+            <pc:docMk/>
+            <pc:sldMk cId="0" sldId="261"/>
+            <ac:spMk id="11" creationId="{1F90F034-3029-D1A9-C2D2-A770A9A40591}"/>
+          </ac:spMkLst>
+        </pc:spChg>
       </pc:sldChg>
       <pc:sldChg chg="addSp delSp modSp mod">
-        <pc:chgData name="hp hp" userId="c106d3f60ba7ea1e" providerId="LiveId" clId="{8675EC9B-3D11-4CB5-A949-4C74E4654834}" dt="2026-08-28T13:09:17.815" v="3825" actId="20577"/>
+        <pc:chgData name="hp hp" userId="c106d3f60ba7ea1e" providerId="LiveId" clId="{8675EC9B-3D11-4CB5-A949-4C74E4654834}" dt="2026-08-29T04:00:58.263" v="4176" actId="14100"/>
         <pc:sldMkLst>
           <pc:docMk/>
           <pc:sldMk cId="0" sldId="262"/>
         </pc:sldMkLst>
         <pc:spChg chg="mod">
-          <ac:chgData name="hp hp" userId="c106d3f60ba7ea1e" providerId="LiveId" clId="{8675EC9B-3D11-4CB5-A949-4C74E4654834}" dt="2026-08-28T13:09:17.815" v="3825" actId="20577"/>
+          <ac:chgData name="hp hp" userId="c106d3f60ba7ea1e" providerId="LiveId" clId="{8675EC9B-3D11-4CB5-A949-4C74E4654834}" dt="2026-08-29T03:57:52.084" v="4069" actId="6549"/>
           <ac:spMkLst>
             <pc:docMk/>
             <pc:sldMk cId="0" sldId="262"/>
             <ac:spMk id="10" creationId="{00000000-0000-0000-0000-000000000000}"/>
+          </ac:spMkLst>
+        </pc:spChg>
+        <pc:spChg chg="add mod">
+          <ac:chgData name="hp hp" userId="c106d3f60ba7ea1e" providerId="LiveId" clId="{8675EC9B-3D11-4CB5-A949-4C74E4654834}" dt="2026-08-29T04:00:58.263" v="4176" actId="14100"/>
+          <ac:spMkLst>
+            <pc:docMk/>
+            <pc:sldMk cId="0" sldId="262"/>
+            <ac:spMk id="11" creationId="{DE3D6C63-2169-1235-4C46-0396467BFD6C}"/>
           </ac:spMkLst>
         </pc:spChg>
         <pc:spChg chg="add del mod">
@@ -393,6 +460,81 @@
             <ac:spMk id="14" creationId="{2B287E28-A8CA-36ED-5677-12FBB299D217}"/>
           </ac:spMkLst>
         </pc:spChg>
+      </pc:sldChg>
+      <pc:sldChg chg="del">
+        <pc:chgData name="hp hp" userId="c106d3f60ba7ea1e" providerId="LiveId" clId="{8675EC9B-3D11-4CB5-A949-4C74E4654834}" dt="2026-08-29T04:11:45.882" v="4217" actId="2696"/>
+        <pc:sldMkLst>
+          <pc:docMk/>
+          <pc:sldMk cId="0" sldId="263"/>
+        </pc:sldMkLst>
+      </pc:sldChg>
+      <pc:sldChg chg="new del">
+        <pc:chgData name="hp hp" userId="c106d3f60ba7ea1e" providerId="LiveId" clId="{8675EC9B-3D11-4CB5-A949-4C74E4654834}" dt="2026-08-29T03:29:11.275" v="3886" actId="680"/>
+        <pc:sldMkLst>
+          <pc:docMk/>
+          <pc:sldMk cId="384821711" sldId="264"/>
+        </pc:sldMkLst>
+      </pc:sldChg>
+      <pc:sldChg chg="new del">
+        <pc:chgData name="hp hp" userId="c106d3f60ba7ea1e" providerId="LiveId" clId="{8675EC9B-3D11-4CB5-A949-4C74E4654834}" dt="2026-08-29T03:29:20.295" v="3888" actId="680"/>
+        <pc:sldMkLst>
+          <pc:docMk/>
+          <pc:sldMk cId="1113328371" sldId="264"/>
+        </pc:sldMkLst>
+      </pc:sldChg>
+      <pc:sldChg chg="addSp delSp modSp add mod">
+        <pc:chgData name="hp hp" userId="c106d3f60ba7ea1e" providerId="LiveId" clId="{8675EC9B-3D11-4CB5-A949-4C74E4654834}" dt="2026-08-29T03:36:00.242" v="3933" actId="255"/>
+        <pc:sldMkLst>
+          <pc:docMk/>
+          <pc:sldMk cId="1491258336" sldId="264"/>
+        </pc:sldMkLst>
+        <pc:spChg chg="del mod">
+          <ac:chgData name="hp hp" userId="c106d3f60ba7ea1e" providerId="LiveId" clId="{8675EC9B-3D11-4CB5-A949-4C74E4654834}" dt="2026-08-29T03:30:40.901" v="3893"/>
+          <ac:spMkLst>
+            <pc:docMk/>
+            <pc:sldMk cId="1491258336" sldId="264"/>
+            <ac:spMk id="8" creationId="{3C1FD63B-736E-C359-850C-F320E9355DE4}"/>
+          </ac:spMkLst>
+        </pc:spChg>
+        <pc:spChg chg="add mod">
+          <ac:chgData name="hp hp" userId="c106d3f60ba7ea1e" providerId="LiveId" clId="{8675EC9B-3D11-4CB5-A949-4C74E4654834}" dt="2026-08-29T03:36:00.242" v="3933" actId="255"/>
+          <ac:spMkLst>
+            <pc:docMk/>
+            <pc:sldMk cId="1491258336" sldId="264"/>
+            <ac:spMk id="9" creationId="{0914912D-3D65-A692-78E1-B687D450C1A0}"/>
+          </ac:spMkLst>
+        </pc:spChg>
+      </pc:sldChg>
+      <pc:sldChg chg="addSp delSp modSp add mod">
+        <pc:chgData name="hp hp" userId="c106d3f60ba7ea1e" providerId="LiveId" clId="{8675EC9B-3D11-4CB5-A949-4C74E4654834}" dt="2026-08-29T03:41:41.521" v="3948" actId="14100"/>
+        <pc:sldMkLst>
+          <pc:docMk/>
+          <pc:sldMk cId="4253906632" sldId="265"/>
+        </pc:sldMkLst>
+        <pc:spChg chg="mod">
+          <ac:chgData name="hp hp" userId="c106d3f60ba7ea1e" providerId="LiveId" clId="{8675EC9B-3D11-4CB5-A949-4C74E4654834}" dt="2026-08-29T03:40:58.977" v="3942" actId="1076"/>
+          <ac:spMkLst>
+            <pc:docMk/>
+            <pc:sldMk cId="4253906632" sldId="265"/>
+            <ac:spMk id="3" creationId="{D6A64F7A-7DE7-709C-0B18-75D5EA7A051B}"/>
+          </ac:spMkLst>
+        </pc:spChg>
+        <pc:picChg chg="del">
+          <ac:chgData name="hp hp" userId="c106d3f60ba7ea1e" providerId="LiveId" clId="{8675EC9B-3D11-4CB5-A949-4C74E4654834}" dt="2026-08-29T03:39:24.820" v="3939" actId="21"/>
+          <ac:picMkLst>
+            <pc:docMk/>
+            <pc:sldMk cId="4253906632" sldId="265"/>
+            <ac:picMk id="12" creationId="{BBEF4ED4-B97D-AA1E-79CC-C3A7F31CA921}"/>
+          </ac:picMkLst>
+        </pc:picChg>
+        <pc:picChg chg="add mod">
+          <ac:chgData name="hp hp" userId="c106d3f60ba7ea1e" providerId="LiveId" clId="{8675EC9B-3D11-4CB5-A949-4C74E4654834}" dt="2026-08-29T03:41:41.521" v="3948" actId="14100"/>
+          <ac:picMkLst>
+            <pc:docMk/>
+            <pc:sldMk cId="4253906632" sldId="265"/>
+            <ac:picMk id="13" creationId="{3C228938-DC77-B1B3-7EA9-217AD72ECB24}"/>
+          </ac:picMkLst>
+        </pc:picChg>
       </pc:sldChg>
     </pc:docChg>
   </pc:docChgLst>
@@ -579,7 +721,7 @@
             <a:fld id="{1D8BD707-D9CF-40AE-B4C6-C98DA3205C09}" type="datetimeFigureOut">
               <a:rPr lang="en-US" smtClean="0"/>
               <a:pPr/>
-              <a:t>8/28/2026</a:t>
+              <a:t>8/29/2026</a:t>
             </a:fld>
             <a:endParaRPr lang="en-US"/>
           </a:p>
@@ -744,7 +886,7 @@
             <a:fld id="{1D8BD707-D9CF-40AE-B4C6-C98DA3205C09}" type="datetimeFigureOut">
               <a:rPr lang="en-US" smtClean="0"/>
               <a:pPr/>
-              <a:t>8/28/2026</a:t>
+              <a:t>8/29/2026</a:t>
             </a:fld>
             <a:endParaRPr lang="en-US"/>
           </a:p>
@@ -919,7 +1061,7 @@
             <a:fld id="{1D8BD707-D9CF-40AE-B4C6-C98DA3205C09}" type="datetimeFigureOut">
               <a:rPr lang="en-US" smtClean="0"/>
               <a:pPr/>
-              <a:t>8/28/2026</a:t>
+              <a:t>8/29/2026</a:t>
             </a:fld>
             <a:endParaRPr lang="en-US"/>
           </a:p>
@@ -1084,7 +1226,7 @@
             <a:fld id="{1D8BD707-D9CF-40AE-B4C6-C98DA3205C09}" type="datetimeFigureOut">
               <a:rPr lang="en-US" smtClean="0"/>
               <a:pPr/>
-              <a:t>8/28/2026</a:t>
+              <a:t>8/29/2026</a:t>
             </a:fld>
             <a:endParaRPr lang="en-US"/>
           </a:p>
@@ -1326,7 +1468,7 @@
             <a:fld id="{1D8BD707-D9CF-40AE-B4C6-C98DA3205C09}" type="datetimeFigureOut">
               <a:rPr lang="en-US" smtClean="0"/>
               <a:pPr/>
-              <a:t>8/28/2026</a:t>
+              <a:t>8/29/2026</a:t>
             </a:fld>
             <a:endParaRPr lang="en-US"/>
           </a:p>
@@ -1608,7 +1750,7 @@
             <a:fld id="{1D8BD707-D9CF-40AE-B4C6-C98DA3205C09}" type="datetimeFigureOut">
               <a:rPr lang="en-US" smtClean="0"/>
               <a:pPr/>
-              <a:t>8/28/2026</a:t>
+              <a:t>8/29/2026</a:t>
             </a:fld>
             <a:endParaRPr lang="en-US"/>
           </a:p>
@@ -2024,7 +2166,7 @@
             <a:fld id="{1D8BD707-D9CF-40AE-B4C6-C98DA3205C09}" type="datetimeFigureOut">
               <a:rPr lang="en-US" smtClean="0"/>
               <a:pPr/>
-              <a:t>8/28/2026</a:t>
+              <a:t>8/29/2026</a:t>
             </a:fld>
             <a:endParaRPr lang="en-US"/>
           </a:p>
@@ -2138,7 +2280,7 @@
             <a:fld id="{1D8BD707-D9CF-40AE-B4C6-C98DA3205C09}" type="datetimeFigureOut">
               <a:rPr lang="en-US" smtClean="0"/>
               <a:pPr/>
-              <a:t>8/28/2026</a:t>
+              <a:t>8/29/2026</a:t>
             </a:fld>
             <a:endParaRPr lang="en-US"/>
           </a:p>
@@ -2230,7 +2372,7 @@
             <a:fld id="{1D8BD707-D9CF-40AE-B4C6-C98DA3205C09}" type="datetimeFigureOut">
               <a:rPr lang="en-US" smtClean="0"/>
               <a:pPr/>
-              <a:t>8/28/2026</a:t>
+              <a:t>8/29/2026</a:t>
             </a:fld>
             <a:endParaRPr lang="en-US"/>
           </a:p>
@@ -2502,7 +2644,7 @@
             <a:fld id="{1D8BD707-D9CF-40AE-B4C6-C98DA3205C09}" type="datetimeFigureOut">
               <a:rPr lang="en-US" smtClean="0"/>
               <a:pPr/>
-              <a:t>8/28/2026</a:t>
+              <a:t>8/29/2026</a:t>
             </a:fld>
             <a:endParaRPr lang="en-US"/>
           </a:p>
@@ -2751,7 +2893,7 @@
             <a:fld id="{1D8BD707-D9CF-40AE-B4C6-C98DA3205C09}" type="datetimeFigureOut">
               <a:rPr lang="en-US" smtClean="0"/>
               <a:pPr/>
-              <a:t>8/28/2026</a:t>
+              <a:t>8/29/2026</a:t>
             </a:fld>
             <a:endParaRPr lang="en-US"/>
           </a:p>
@@ -2959,7 +3101,7 @@
             <a:fld id="{1D8BD707-D9CF-40AE-B4C6-C98DA3205C09}" type="datetimeFigureOut">
               <a:rPr lang="en-US" smtClean="0"/>
               <a:pPr/>
-              <a:t>8/28/2026</a:t>
+              <a:t>8/29/2026</a:t>
             </a:fld>
             <a:endParaRPr lang="en-US"/>
           </a:p>
@@ -3814,7 +3956,7 @@
                 <a:cs typeface="Times New Roman MT Bold"/>
                 <a:sym typeface="Times New Roman MT Bold"/>
               </a:rPr>
-              <a:t>PROBELM STATEMENT NO: PS 06</a:t>
+              <a:t>PROBELEM STATEMENT NO: PS 06</a:t>
             </a:r>
           </a:p>
         </p:txBody>
@@ -4308,8 +4450,8 @@
         </p:nvSpPr>
         <p:spPr>
           <a:xfrm>
-            <a:off x="1002917" y="3259742"/>
-            <a:ext cx="16446883" cy="6391493"/>
+            <a:off x="12341" y="1663942"/>
+            <a:ext cx="18285183" cy="2082621"/>
           </a:xfrm>
           <a:prstGeom prst="rect">
             <a:avLst/>
@@ -4356,168 +4498,6 @@
             </a:endParaRPr>
           </a:p>
           <a:p>
-            <a:pPr>
-              <a:lnSpc>
-                <a:spcPts val="5592"/>
-              </a:lnSpc>
-            </a:pPr>
-            <a:r>
-              <a:rPr lang="en-US" sz="4000" b="1" dirty="0">
-                <a:solidFill>
-                  <a:srgbClr val="000000"/>
-                </a:solidFill>
-                <a:latin typeface="Times New Roman" panose="02020603050405020304" pitchFamily="18" charset="0"/>
-                <a:ea typeface="Horizon"/>
-                <a:cs typeface="Times New Roman" panose="02020603050405020304" pitchFamily="18" charset="0"/>
-                <a:sym typeface="Horizon"/>
-              </a:rPr>
-              <a:t>Real world problems :</a:t>
-            </a:r>
-            <a:r>
-              <a:rPr lang="en-US" sz="4000" dirty="0">
-                <a:solidFill>
-                  <a:srgbClr val="000000"/>
-                </a:solidFill>
-                <a:latin typeface="Times New Roman" panose="02020603050405020304" pitchFamily="18" charset="0"/>
-                <a:ea typeface="Horizon"/>
-                <a:cs typeface="Times New Roman" panose="02020603050405020304" pitchFamily="18" charset="0"/>
-                <a:sym typeface="Horizon"/>
-              </a:rPr>
-              <a:t>Secure data encryption is needed in FPGA/SOC systems</a:t>
-            </a:r>
-            <a:endParaRPr lang="en-US" sz="4000" b="1" dirty="0">
-              <a:solidFill>
-                <a:srgbClr val="000000"/>
-              </a:solidFill>
-              <a:latin typeface="Times New Roman" panose="02020603050405020304" pitchFamily="18" charset="0"/>
-              <a:ea typeface="Horizon"/>
-              <a:cs typeface="Times New Roman" panose="02020603050405020304" pitchFamily="18" charset="0"/>
-              <a:sym typeface="Horizon"/>
-            </a:endParaRPr>
-          </a:p>
-          <a:p>
-            <a:pPr>
-              <a:lnSpc>
-                <a:spcPts val="5592"/>
-              </a:lnSpc>
-            </a:pPr>
-            <a:r>
-              <a:rPr lang="en-US" sz="4000" b="1" dirty="0">
-                <a:solidFill>
-                  <a:srgbClr val="000000"/>
-                </a:solidFill>
-                <a:latin typeface="Times New Roman" panose="02020603050405020304" pitchFamily="18" charset="0"/>
-                <a:ea typeface="Horizon"/>
-                <a:cs typeface="Times New Roman" panose="02020603050405020304" pitchFamily="18" charset="0"/>
-                <a:sym typeface="Horizon"/>
-              </a:rPr>
-              <a:t>Why it matters :</a:t>
-            </a:r>
-            <a:r>
-              <a:rPr lang="en-US" sz="4000" dirty="0">
-                <a:solidFill>
-                  <a:srgbClr val="000000"/>
-                </a:solidFill>
-                <a:latin typeface="Times New Roman" panose="02020603050405020304" pitchFamily="18" charset="0"/>
-                <a:ea typeface="Horizon"/>
-                <a:cs typeface="Times New Roman" panose="02020603050405020304" pitchFamily="18" charset="0"/>
-                <a:sym typeface="Horizon"/>
-              </a:rPr>
-              <a:t> Protects sensitive data with fast hardware  based  AES</a:t>
-            </a:r>
-          </a:p>
-          <a:p>
-            <a:pPr>
-              <a:lnSpc>
-                <a:spcPts val="5592"/>
-              </a:lnSpc>
-            </a:pPr>
-            <a:r>
-              <a:rPr lang="en-US" sz="4000" b="1" dirty="0">
-                <a:solidFill>
-                  <a:srgbClr val="000000"/>
-                </a:solidFill>
-                <a:latin typeface="Times New Roman" panose="02020603050405020304" pitchFamily="18" charset="0"/>
-                <a:ea typeface="Horizon"/>
-                <a:cs typeface="Times New Roman" panose="02020603050405020304" pitchFamily="18" charset="0"/>
-                <a:sym typeface="Horizon"/>
-              </a:rPr>
-              <a:t>Current challenges :</a:t>
-            </a:r>
-            <a:endParaRPr lang="en-US" sz="4000" dirty="0">
-              <a:solidFill>
-                <a:srgbClr val="000000"/>
-              </a:solidFill>
-              <a:latin typeface="Times New Roman" panose="02020603050405020304" pitchFamily="18" charset="0"/>
-              <a:ea typeface="Horizon"/>
-              <a:cs typeface="Times New Roman" panose="02020603050405020304" pitchFamily="18" charset="0"/>
-              <a:sym typeface="Horizon"/>
-            </a:endParaRPr>
-          </a:p>
-          <a:p>
-            <a:pPr marL="457200" indent="-457200">
-              <a:lnSpc>
-                <a:spcPts val="5592"/>
-              </a:lnSpc>
-              <a:buFont typeface="Wingdings" panose="05000000000000000000" pitchFamily="2" charset="2"/>
-              <a:buChar char="Ø"/>
-            </a:pPr>
-            <a:r>
-              <a:rPr lang="en-US" sz="4000" dirty="0">
-                <a:solidFill>
-                  <a:srgbClr val="000000"/>
-                </a:solidFill>
-                <a:latin typeface="Times New Roman" panose="02020603050405020304" pitchFamily="18" charset="0"/>
-                <a:ea typeface="Horizon"/>
-                <a:cs typeface="Times New Roman" panose="02020603050405020304" pitchFamily="18" charset="0"/>
-                <a:sym typeface="Horizon"/>
-              </a:rPr>
-              <a:t>Low LUT usage  (&lt;1500 )  </a:t>
-            </a:r>
-          </a:p>
-          <a:p>
-            <a:pPr marL="457200" indent="-457200">
-              <a:lnSpc>
-                <a:spcPts val="5592"/>
-              </a:lnSpc>
-              <a:buFont typeface="Wingdings" panose="05000000000000000000" pitchFamily="2" charset="2"/>
-              <a:buChar char="Ø"/>
-            </a:pPr>
-            <a:r>
-              <a:rPr lang="en-US" sz="4000" dirty="0">
-                <a:solidFill>
-                  <a:srgbClr val="000000"/>
-                </a:solidFill>
-                <a:latin typeface="Times New Roman" panose="02020603050405020304" pitchFamily="18" charset="0"/>
-                <a:ea typeface="Horizon"/>
-                <a:cs typeface="Times New Roman" panose="02020603050405020304" pitchFamily="18" charset="0"/>
-                <a:sym typeface="Horizon"/>
-              </a:rPr>
-              <a:t>High throughput  ( 1 block)</a:t>
-            </a:r>
-          </a:p>
-          <a:p>
-            <a:pPr marL="457200" indent="-457200">
-              <a:lnSpc>
-                <a:spcPts val="5592"/>
-              </a:lnSpc>
-              <a:buFont typeface="Wingdings" panose="05000000000000000000" pitchFamily="2" charset="2"/>
-              <a:buChar char="Ø"/>
-            </a:pPr>
-            <a:r>
-              <a:rPr lang="en-US" sz="4000" dirty="0">
-                <a:solidFill>
-                  <a:srgbClr val="000000"/>
-                </a:solidFill>
-                <a:latin typeface="Times New Roman" panose="02020603050405020304" pitchFamily="18" charset="0"/>
-                <a:ea typeface="Horizon"/>
-                <a:cs typeface="Times New Roman" panose="02020603050405020304" pitchFamily="18" charset="0"/>
-                <a:sym typeface="Horizon"/>
-              </a:rPr>
-              <a:t>No key/internal state leakage  </a:t>
-            </a:r>
-          </a:p>
-          <a:p>
             <a:pPr marL="457200" indent="-457200" algn="ctr">
               <a:lnSpc>
                 <a:spcPts val="5592"/>
@@ -4531,7 +4511,7 @@
               </a:solidFill>
               <a:latin typeface="Horizon"/>
               <a:ea typeface="Horizon"/>
-              <a:cs typeface="Horizon"/>
+              <a:cs typeface="Times New Roman" panose="02020603050405020304" pitchFamily="18" charset="0"/>
               <a:sym typeface="Horizon"/>
             </a:endParaRPr>
           </a:p>
@@ -4647,6 +4627,212 @@
           <a:lstStyle/>
           <a:p>
             <a:endParaRPr lang="en-GB"/>
+          </a:p>
+        </p:txBody>
+      </p:sp>
+      <p:sp>
+        <p:nvSpPr>
+          <p:cNvPr id="10" name="TextBox 9">
+            <a:extLst>
+              <a:ext uri="{FF2B5EF4-FFF2-40B4-BE49-F238E27FC236}">
+                <a16:creationId xmlns:a16="http://schemas.microsoft.com/office/drawing/2014/main" id="{514E0D0C-FD81-EC44-6FB9-7FA79BFA4010}"/>
+              </a:ext>
+            </a:extLst>
+          </p:cNvPr>
+          <p:cNvSpPr txBox="1"/>
+          <p:nvPr/>
+        </p:nvSpPr>
+        <p:spPr>
+          <a:xfrm>
+            <a:off x="1143924" y="2330398"/>
+            <a:ext cx="14669729" cy="7848302"/>
+          </a:xfrm>
+          <a:prstGeom prst="rect">
+            <a:avLst/>
+          </a:prstGeom>
+          <a:noFill/>
+        </p:spPr>
+        <p:txBody>
+          <a:bodyPr wrap="square" rtlCol="0">
+            <a:spAutoFit/>
+          </a:bodyPr>
+          <a:lstStyle/>
+          <a:p>
+            <a:endParaRPr lang="en-GB" sz="2400" dirty="0">
+              <a:latin typeface="Times New Roman MT" panose="020B0604020202020204" charset="0"/>
+            </a:endParaRPr>
+          </a:p>
+          <a:p>
+            <a:pPr marL="342900" indent="-342900">
+              <a:buFont typeface="Wingdings" panose="05000000000000000000" pitchFamily="2" charset="2"/>
+              <a:buChar char="Ø"/>
+            </a:pPr>
+            <a:r>
+              <a:rPr lang="en-GB" sz="2400" b="1" dirty="0">
+                <a:latin typeface="Times New Roman MT" panose="020B0604020202020204" charset="0"/>
+              </a:rPr>
+              <a:t>Real-World Problems</a:t>
+            </a:r>
+            <a:r>
+              <a:rPr lang="en-GB" sz="2400" dirty="0">
+                <a:latin typeface="Times New Roman MT" panose="020B0604020202020204" charset="0"/>
+              </a:rPr>
+              <a:t>:</a:t>
+            </a:r>
+          </a:p>
+          <a:p>
+            <a:pPr marL="342900" indent="-342900">
+              <a:buFont typeface="Wingdings" panose="05000000000000000000" pitchFamily="2" charset="2"/>
+              <a:buChar char="§"/>
+            </a:pPr>
+            <a:r>
+              <a:rPr lang="en-GB" sz="2400" dirty="0">
+                <a:latin typeface="Times New Roman MT" panose="020B0604020202020204" charset="0"/>
+              </a:rPr>
+              <a:t>Modern FPGA/SoC systems demand high-speed symmetric cryptographic acceleration for data-in-transit and data-at-rest.</a:t>
+            </a:r>
+          </a:p>
+          <a:p>
+            <a:pPr marL="342900" indent="-342900">
+              <a:buFont typeface="Wingdings" panose="05000000000000000000" pitchFamily="2" charset="2"/>
+              <a:buChar char="§"/>
+            </a:pPr>
+            <a:r>
+              <a:rPr lang="en-GB" sz="2400" dirty="0">
+                <a:latin typeface="Times New Roman MT" panose="020B0604020202020204" charset="0"/>
+              </a:rPr>
+              <a:t>Software encryption throttles CPU throughput and exposes critical keys to side-channel and memory snooping attacks.</a:t>
+            </a:r>
+          </a:p>
+          <a:p>
+            <a:endParaRPr lang="en-GB" sz="2400" dirty="0">
+              <a:latin typeface="Times New Roman MT" panose="020B0604020202020204" charset="0"/>
+            </a:endParaRPr>
+          </a:p>
+          <a:p>
+            <a:pPr marL="342900" indent="-342900">
+              <a:buFont typeface="Wingdings" panose="05000000000000000000" pitchFamily="2" charset="2"/>
+              <a:buChar char="Ø"/>
+            </a:pPr>
+            <a:r>
+              <a:rPr lang="en-GB" sz="2400" b="1" dirty="0">
+                <a:latin typeface="Times New Roman MT" panose="020B0604020202020204" charset="0"/>
+              </a:rPr>
+              <a:t>Why It Matters</a:t>
+            </a:r>
+            <a:r>
+              <a:rPr lang="en-GB" sz="2400" dirty="0">
+                <a:latin typeface="Times New Roman MT" panose="020B0604020202020204" charset="0"/>
+              </a:rPr>
+              <a:t>:</a:t>
+            </a:r>
+          </a:p>
+          <a:p>
+            <a:pPr marL="342900" indent="-342900">
+              <a:buFont typeface="Wingdings" panose="05000000000000000000" pitchFamily="2" charset="2"/>
+              <a:buChar char="§"/>
+            </a:pPr>
+            <a:r>
+              <a:rPr lang="en-GB" sz="2400" dirty="0">
+                <a:latin typeface="Times New Roman MT" panose="020B0604020202020204" charset="0"/>
+              </a:rPr>
+              <a:t>Secures high-bandwidth streaming channels (Ethernet, PCIe, DMA) with low-latency hardware cipher engines.</a:t>
+            </a:r>
+          </a:p>
+          <a:p>
+            <a:pPr marL="342900" indent="-342900">
+              <a:buFont typeface="Wingdings" panose="05000000000000000000" pitchFamily="2" charset="2"/>
+              <a:buChar char="§"/>
+            </a:pPr>
+            <a:r>
+              <a:rPr lang="en-GB" sz="2400" dirty="0">
+                <a:latin typeface="Times New Roman MT" panose="020B0604020202020204" charset="0"/>
+              </a:rPr>
+              <a:t>Essential for </a:t>
+            </a:r>
+            <a:r>
+              <a:rPr lang="en-GB" sz="2400" dirty="0" err="1">
+                <a:latin typeface="Times New Roman MT" panose="020B0604020202020204" charset="0"/>
+              </a:rPr>
+              <a:t>defense</a:t>
+            </a:r>
+            <a:r>
+              <a:rPr lang="en-GB" sz="2400" dirty="0">
+                <a:latin typeface="Times New Roman MT" panose="020B0604020202020204" charset="0"/>
+              </a:rPr>
+              <a:t>, aerospace, financial transaction processing, and secure IoT edge gateways.</a:t>
+            </a:r>
+          </a:p>
+          <a:p>
+            <a:endParaRPr lang="en-GB" sz="2400" dirty="0">
+              <a:latin typeface="Times New Roman MT" panose="020B0604020202020204" charset="0"/>
+            </a:endParaRPr>
+          </a:p>
+          <a:p>
+            <a:pPr marL="342900" indent="-342900">
+              <a:buFont typeface="Wingdings" panose="05000000000000000000" pitchFamily="2" charset="2"/>
+              <a:buChar char="Ø"/>
+            </a:pPr>
+            <a:r>
+              <a:rPr lang="en-GB" sz="2400" b="1" dirty="0">
+                <a:latin typeface="Times New Roman MT" panose="020B0604020202020204" charset="0"/>
+              </a:rPr>
+              <a:t>Current Industry &amp; Hardware Challenges</a:t>
+            </a:r>
+            <a:r>
+              <a:rPr lang="en-GB" sz="2400" dirty="0">
+                <a:latin typeface="Times New Roman MT" panose="020B0604020202020204" charset="0"/>
+              </a:rPr>
+              <a:t>:</a:t>
+            </a:r>
+          </a:p>
+          <a:p>
+            <a:pPr marL="342900" indent="-342900">
+              <a:buFont typeface="Wingdings" panose="05000000000000000000" pitchFamily="2" charset="2"/>
+              <a:buChar char="§"/>
+            </a:pPr>
+            <a:r>
+              <a:rPr lang="en-GB" sz="2400" dirty="0">
+                <a:latin typeface="Times New Roman MT" panose="020B0604020202020204" charset="0"/>
+              </a:rPr>
+              <a:t>Area vs. Throughput Bottleneck: Unrolled pipelines consume excessive LUTs (&gt;10,000 LUTs), while simple micro-engines suffer high latency (&gt;40 cycles).</a:t>
+            </a:r>
+          </a:p>
+          <a:p>
+            <a:pPr marL="342900" indent="-342900">
+              <a:buFont typeface="Wingdings" panose="05000000000000000000" pitchFamily="2" charset="2"/>
+              <a:buChar char="§"/>
+            </a:pPr>
+            <a:r>
+              <a:rPr lang="en-GB" sz="2400" dirty="0">
+                <a:latin typeface="Times New Roman MT" panose="020B0604020202020204" charset="0"/>
+              </a:rPr>
+              <a:t>Memory Constraints: Many implementations rely on pre-computed BRAM tables, violating zero-BRAM rules and risking memory dump attacks.</a:t>
+            </a:r>
+          </a:p>
+          <a:p>
+            <a:pPr marL="342900" indent="-342900">
+              <a:buFont typeface="Wingdings" panose="05000000000000000000" pitchFamily="2" charset="2"/>
+              <a:buChar char="§"/>
+            </a:pPr>
+            <a:r>
+              <a:rPr lang="en-GB" sz="2400" dirty="0">
+                <a:latin typeface="Times New Roman MT" panose="020B0604020202020204" charset="0"/>
+              </a:rPr>
+              <a:t>System Bus Vulnerabilities: Standard AXI peripherals lack hardware-enforced cryptographic boundaries, risking secret key and intermediate round leakage.</a:t>
+            </a:r>
+          </a:p>
+          <a:p>
+            <a:pPr marL="342900" indent="-342900">
+              <a:buFont typeface="Wingdings" panose="05000000000000000000" pitchFamily="2" charset="2"/>
+              <a:buChar char="§"/>
+            </a:pPr>
+            <a:r>
+              <a:rPr lang="en-GB" sz="2400" dirty="0">
+                <a:latin typeface="Times New Roman MT" panose="020B0604020202020204" charset="0"/>
+              </a:rPr>
+              <a:t>Protocol Limitations: Most designs only support basic ECB mode without cipher feedback, counter modes, or authentication.</a:t>
+            </a:r>
           </a:p>
         </p:txBody>
       </p:sp>
@@ -4671,7 +4857,13 @@
     </p:bg>
     <p:spTree>
       <p:nvGrpSpPr>
-        <p:cNvPr id="1" name=""/>
+        <p:cNvPr id="1" name="">
+          <a:extLst>
+            <a:ext uri="{FF2B5EF4-FFF2-40B4-BE49-F238E27FC236}">
+              <a16:creationId xmlns:a16="http://schemas.microsoft.com/office/drawing/2014/main" id="{168F2F08-6F9D-6532-D763-55DC045A3BEB}"/>
+            </a:ext>
+          </a:extLst>
+        </p:cNvPr>
         <p:cNvGrpSpPr/>
         <p:nvPr/>
       </p:nvGrpSpPr>
@@ -4685,7 +4877,13 @@
       </p:grpSpPr>
       <p:sp>
         <p:nvSpPr>
-          <p:cNvPr id="2" name="Freeform 2"/>
+          <p:cNvPr id="2" name="Freeform 2">
+            <a:extLst>
+              <a:ext uri="{FF2B5EF4-FFF2-40B4-BE49-F238E27FC236}">
+                <a16:creationId xmlns:a16="http://schemas.microsoft.com/office/drawing/2014/main" id="{263D28BA-CA28-D47F-2954-6B372DFCE5A2}"/>
+              </a:ext>
+            </a:extLst>
+          </p:cNvPr>
           <p:cNvSpPr/>
           <p:nvPr/>
         </p:nvSpPr>
@@ -4738,7 +4936,13 @@
       </p:sp>
       <p:sp>
         <p:nvSpPr>
-          <p:cNvPr id="3" name="Freeform 3"/>
+          <p:cNvPr id="3" name="Freeform 3">
+            <a:extLst>
+              <a:ext uri="{FF2B5EF4-FFF2-40B4-BE49-F238E27FC236}">
+                <a16:creationId xmlns:a16="http://schemas.microsoft.com/office/drawing/2014/main" id="{21B565D2-4E74-F42A-CA51-2208EA3FFE82}"/>
+              </a:ext>
+            </a:extLst>
+          </p:cNvPr>
           <p:cNvSpPr/>
           <p:nvPr/>
         </p:nvSpPr>
@@ -4791,7 +4995,13 @@
       </p:sp>
       <p:sp>
         <p:nvSpPr>
-          <p:cNvPr id="4" name="Freeform 4"/>
+          <p:cNvPr id="4" name="Freeform 4">
+            <a:extLst>
+              <a:ext uri="{FF2B5EF4-FFF2-40B4-BE49-F238E27FC236}">
+                <a16:creationId xmlns:a16="http://schemas.microsoft.com/office/drawing/2014/main" id="{9D888749-C6E8-6418-9663-B3A73ABF6E28}"/>
+              </a:ext>
+            </a:extLst>
+          </p:cNvPr>
           <p:cNvSpPr/>
           <p:nvPr/>
         </p:nvSpPr>
@@ -4844,7 +5054,13 @@
       </p:sp>
       <p:sp>
         <p:nvSpPr>
-          <p:cNvPr id="5" name="Freeform 5"/>
+          <p:cNvPr id="5" name="Freeform 5">
+            <a:extLst>
+              <a:ext uri="{FF2B5EF4-FFF2-40B4-BE49-F238E27FC236}">
+                <a16:creationId xmlns:a16="http://schemas.microsoft.com/office/drawing/2014/main" id="{6FE8E006-9D9A-6B04-1998-09C526D1C80A}"/>
+              </a:ext>
+            </a:extLst>
+          </p:cNvPr>
           <p:cNvSpPr/>
           <p:nvPr/>
         </p:nvSpPr>
@@ -4897,7 +5113,13 @@
       </p:sp>
       <p:sp>
         <p:nvSpPr>
-          <p:cNvPr id="6" name="Freeform 6"/>
+          <p:cNvPr id="6" name="Freeform 6">
+            <a:extLst>
+              <a:ext uri="{FF2B5EF4-FFF2-40B4-BE49-F238E27FC236}">
+                <a16:creationId xmlns:a16="http://schemas.microsoft.com/office/drawing/2014/main" id="{44E3B662-26E5-4B8C-8F52-5870DA39C6D9}"/>
+              </a:ext>
+            </a:extLst>
+          </p:cNvPr>
           <p:cNvSpPr/>
           <p:nvPr/>
         </p:nvSpPr>
@@ -4950,7 +5172,13 @@
       </p:sp>
       <p:sp>
         <p:nvSpPr>
-          <p:cNvPr id="7" name="Freeform 7"/>
+          <p:cNvPr id="7" name="Freeform 7">
+            <a:extLst>
+              <a:ext uri="{FF2B5EF4-FFF2-40B4-BE49-F238E27FC236}">
+                <a16:creationId xmlns:a16="http://schemas.microsoft.com/office/drawing/2014/main" id="{042B9B05-9FCE-9846-96CD-AACDE8BBB080}"/>
+              </a:ext>
+            </a:extLst>
+          </p:cNvPr>
           <p:cNvSpPr/>
           <p:nvPr/>
         </p:nvSpPr>
@@ -5010,241 +5238,144 @@
       </p:sp>
       <p:sp>
         <p:nvSpPr>
-          <p:cNvPr id="8" name="TextBox 8"/>
+          <p:cNvPr id="9" name="TextBox 8">
+            <a:extLst>
+              <a:ext uri="{FF2B5EF4-FFF2-40B4-BE49-F238E27FC236}">
+                <a16:creationId xmlns:a16="http://schemas.microsoft.com/office/drawing/2014/main" id="{0914912D-3D65-A692-78E1-B687D450C1A0}"/>
+              </a:ext>
+            </a:extLst>
+          </p:cNvPr>
           <p:cNvSpPr txBox="1"/>
           <p:nvPr/>
         </p:nvSpPr>
         <p:spPr>
           <a:xfrm>
-            <a:off x="12341" y="3001780"/>
-            <a:ext cx="18275659" cy="7262501"/>
+            <a:off x="762000" y="2191724"/>
+            <a:ext cx="16383000" cy="6555641"/>
           </a:xfrm>
           <a:prstGeom prst="rect">
             <a:avLst/>
           </a:prstGeom>
-        </p:spPr>
-        <p:txBody>
-          <a:bodyPr wrap="square" lIns="0" tIns="0" rIns="0" bIns="0" rtlCol="0" anchor="t">
+          <a:noFill/>
+        </p:spPr>
+        <p:txBody>
+          <a:bodyPr wrap="square" rtlCol="0">
             <a:spAutoFit/>
           </a:bodyPr>
           <a:lstStyle/>
           <a:p>
-            <a:pPr algn="l">
-              <a:lnSpc>
-                <a:spcPts val="6879"/>
-              </a:lnSpc>
-            </a:pPr>
-            <a:r>
-              <a:rPr lang="en-US" sz="4913" dirty="0" err="1">
-                <a:solidFill>
-                  <a:srgbClr val="000000"/>
-                </a:solidFill>
-                <a:latin typeface="Horizon"/>
-                <a:ea typeface="Horizon"/>
-                <a:cs typeface="Horizon"/>
-                <a:sym typeface="Horizon"/>
-              </a:rPr>
-              <a:t>yOur</a:t>
-            </a:r>
-            <a:r>
-              <a:rPr lang="en-US" sz="4913" dirty="0">
-                <a:solidFill>
-                  <a:srgbClr val="000000"/>
-                </a:solidFill>
-                <a:latin typeface="Horizon"/>
-                <a:ea typeface="Horizon"/>
-                <a:cs typeface="Horizon"/>
-                <a:sym typeface="Horizon"/>
-              </a:rPr>
-              <a:t> Solution</a:t>
-            </a:r>
-          </a:p>
-          <a:p>
-            <a:pPr marL="1104087" lvl="1" indent="-552044">
-              <a:lnSpc>
-                <a:spcPts val="7159"/>
-              </a:lnSpc>
-              <a:buFont typeface="Arial"/>
-              <a:buChar char="•"/>
-            </a:pPr>
-            <a:r>
-              <a:rPr lang="en-US" sz="5113" b="1" dirty="0">
-                <a:solidFill>
-                  <a:srgbClr val="000000"/>
-                </a:solidFill>
-                <a:latin typeface="Times New Roman MT Bold"/>
-                <a:ea typeface="Times New Roman MT Bold"/>
-                <a:cs typeface="Times New Roman MT Bold"/>
-                <a:sym typeface="Times New Roman MT Bold"/>
-              </a:rPr>
-              <a:t>Project name : </a:t>
-            </a:r>
-            <a:r>
-              <a:rPr lang="en-US" sz="4000" dirty="0">
-                <a:solidFill>
-                  <a:srgbClr val="000000"/>
-                </a:solidFill>
-                <a:latin typeface="Times New Roman" panose="02020603050405020304" pitchFamily="18" charset="0"/>
-                <a:ea typeface="Times New Roman MT Bold"/>
-                <a:cs typeface="Times New Roman" panose="02020603050405020304" pitchFamily="18" charset="0"/>
-                <a:sym typeface="Times New Roman MT Bold"/>
-              </a:rPr>
-              <a:t>Secure &amp; Resource optimized AES-128 FPGA Accelerator.</a:t>
-            </a:r>
-          </a:p>
-          <a:p>
-            <a:pPr marL="1104087" lvl="1" indent="-552044" algn="l">
-              <a:lnSpc>
-                <a:spcPts val="7159"/>
-              </a:lnSpc>
-              <a:buFont typeface="Arial"/>
-              <a:buChar char="•"/>
-            </a:pPr>
-            <a:r>
-              <a:rPr lang="en-US" sz="5113" b="1" dirty="0">
-                <a:solidFill>
-                  <a:srgbClr val="000000"/>
-                </a:solidFill>
-                <a:latin typeface="Times New Roman MT Bold"/>
-                <a:ea typeface="Times New Roman MT Bold"/>
-                <a:cs typeface="Times New Roman MT Bold"/>
-                <a:sym typeface="Times New Roman MT Bold"/>
-              </a:rPr>
-              <a:t>One-line solution : </a:t>
-            </a:r>
-            <a:r>
-              <a:rPr lang="en-US" sz="4000" dirty="0">
-                <a:solidFill>
-                  <a:srgbClr val="000000"/>
-                </a:solidFill>
-                <a:latin typeface="Times New Roman MT" panose="020B0604020202020204" charset="0"/>
-                <a:ea typeface="Times New Roman MT Bold"/>
-                <a:cs typeface="Times New Roman MT Bold"/>
-                <a:sym typeface="Times New Roman MT Bold"/>
-              </a:rPr>
-              <a:t>A </a:t>
-            </a:r>
-            <a:r>
-              <a:rPr lang="en-US" sz="4000" dirty="0" err="1">
-                <a:solidFill>
-                  <a:srgbClr val="000000"/>
-                </a:solidFill>
-                <a:latin typeface="Times New Roman MT" panose="020B0604020202020204" charset="0"/>
-                <a:ea typeface="Times New Roman MT Bold"/>
-                <a:cs typeface="Times New Roman MT Bold"/>
-                <a:sym typeface="Times New Roman MT Bold"/>
-              </a:rPr>
-              <a:t>secure,high</a:t>
-            </a:r>
-            <a:r>
-              <a:rPr lang="en-US" sz="4000" dirty="0">
-                <a:solidFill>
-                  <a:srgbClr val="000000"/>
-                </a:solidFill>
-                <a:latin typeface="Times New Roman MT" panose="020B0604020202020204" charset="0"/>
-                <a:ea typeface="Times New Roman MT Bold"/>
-                <a:cs typeface="Times New Roman MT Bold"/>
-                <a:sym typeface="Times New Roman MT Bold"/>
-              </a:rPr>
-              <a:t> speed AES-128 hardware accelerator with AXI-MM interface and optimized FPGA resource usage.</a:t>
-            </a:r>
-            <a:endParaRPr lang="en-US" sz="5113" b="1" dirty="0">
-              <a:solidFill>
-                <a:srgbClr val="000000"/>
-              </a:solidFill>
-              <a:latin typeface="Times New Roman MT Bold"/>
-              <a:ea typeface="Times New Roman MT Bold"/>
-              <a:cs typeface="Times New Roman MT Bold"/>
-              <a:sym typeface="Times New Roman MT Bold"/>
-            </a:endParaRPr>
-          </a:p>
-          <a:p>
-            <a:pPr marL="1104087" lvl="1" indent="-552044" algn="l">
-              <a:lnSpc>
-                <a:spcPts val="7159"/>
-              </a:lnSpc>
-              <a:buFont typeface="Arial"/>
-              <a:buChar char="•"/>
-            </a:pPr>
-            <a:r>
-              <a:rPr lang="en-US" sz="5113" b="1" dirty="0">
-                <a:solidFill>
-                  <a:srgbClr val="000000"/>
-                </a:solidFill>
-                <a:latin typeface="Times New Roman MT Bold"/>
-                <a:ea typeface="Times New Roman MT Bold"/>
-                <a:cs typeface="Times New Roman MT Bold"/>
-                <a:sym typeface="Times New Roman MT Bold"/>
-              </a:rPr>
-              <a:t>How it solves the problem : </a:t>
-            </a:r>
-          </a:p>
-          <a:p>
-            <a:pPr marL="1123543" lvl="1" indent="-571500" algn="l">
-              <a:lnSpc>
-                <a:spcPts val="7159"/>
-              </a:lnSpc>
+            <a:r>
+              <a:rPr lang="en-GB" sz="2400" dirty="0">
+                <a:latin typeface="Horizon" panose="020B0604020202020204" charset="0"/>
+              </a:rPr>
+              <a:t> </a:t>
+            </a:r>
+            <a:r>
+              <a:rPr lang="en-GB" sz="2800" dirty="0">
+                <a:latin typeface="Horizon" panose="020B0604020202020204" charset="0"/>
+              </a:rPr>
+              <a:t>Our Solution</a:t>
+            </a:r>
+          </a:p>
+          <a:p>
+            <a:endParaRPr lang="en-GB" sz="2800" dirty="0"/>
+          </a:p>
+          <a:p>
+            <a:r>
+              <a:rPr lang="en-GB" sz="2800" b="1" dirty="0">
+                <a:latin typeface="Times New Roman MT" panose="020B0604020202020204" charset="0"/>
+              </a:rPr>
+              <a:t>Project Name</a:t>
+            </a:r>
+            <a:r>
+              <a:rPr lang="en-GB" sz="2800" dirty="0"/>
+              <a:t>: Secure &amp; Resource-Optimized AES-128 FPGA Accelerator with 6-Mode Operating Subsystem.</a:t>
+            </a:r>
+          </a:p>
+          <a:p>
+            <a:endParaRPr lang="en-GB" sz="2800" dirty="0"/>
+          </a:p>
+          <a:p>
+            <a:r>
+              <a:rPr lang="en-GB" sz="2800" b="1" dirty="0">
+                <a:latin typeface="Times New Roman MT" panose="020B0604020202020204" charset="0"/>
+              </a:rPr>
+              <a:t>One-Line Solution</a:t>
+            </a:r>
+            <a:r>
+              <a:rPr lang="en-GB" sz="2800" dirty="0"/>
+              <a:t>: A high-throughput (1.28 Gbps), cryptographically isolated AES-128 accelerator featuring a Full AXI4-MM burst interface, dynamic pipeline folding, on-the-fly round key generation, and a 6-mode NIST operating engine on </a:t>
+            </a:r>
+            <a:r>
+              <a:rPr lang="en-GB" sz="2800" dirty="0" err="1"/>
+              <a:t>Digilent</a:t>
+            </a:r>
+            <a:r>
+              <a:rPr lang="en-GB" sz="2800" dirty="0"/>
+              <a:t> 7-Series FPGA.</a:t>
+            </a:r>
+          </a:p>
+          <a:p>
+            <a:endParaRPr lang="en-GB" sz="2800" dirty="0"/>
+          </a:p>
+          <a:p>
+            <a:r>
+              <a:rPr lang="en-GB" sz="2800" b="1" dirty="0">
+                <a:latin typeface="Times New Roman MT" panose="020B0604020202020204" charset="0"/>
+              </a:rPr>
+              <a:t>How It Solves the Problem</a:t>
+            </a:r>
+            <a:r>
+              <a:rPr lang="en-GB" sz="2800" dirty="0"/>
+              <a:t>:</a:t>
+            </a:r>
+          </a:p>
+          <a:p>
+            <a:pPr marL="342900" indent="-342900">
               <a:buFont typeface="Wingdings" panose="05000000000000000000" pitchFamily="2" charset="2"/>
               <a:buChar char="Ø"/>
             </a:pPr>
             <a:r>
-              <a:rPr lang="en-US" sz="4000" dirty="0">
-                <a:solidFill>
-                  <a:srgbClr val="000000"/>
-                </a:solidFill>
-                <a:latin typeface="Times New Roman MT" panose="020B0604020202020204" charset="0"/>
-                <a:ea typeface="Times New Roman MT Bold"/>
-                <a:cs typeface="Times New Roman MT Bold"/>
-                <a:sym typeface="Times New Roman MT Bold"/>
-              </a:rPr>
-              <a:t>Uses dynamic resources sharing to achieve &lt;1,500 LUTs.</a:t>
-            </a:r>
-          </a:p>
-          <a:p>
-            <a:pPr marL="1123543" lvl="1" indent="-571500" algn="l">
-              <a:lnSpc>
-                <a:spcPts val="7159"/>
-              </a:lnSpc>
+              <a:rPr lang="en-GB" sz="2800" dirty="0"/>
+              <a:t>Dynamic Pipeline Folding &amp; Resource-Sharing: Single-round folded </a:t>
+            </a:r>
+            <a:r>
+              <a:rPr lang="en-GB" sz="2800" dirty="0" err="1"/>
+              <a:t>datapath</a:t>
+            </a:r>
+            <a:r>
+              <a:rPr lang="en-GB" sz="2800" dirty="0"/>
+              <a:t> with shared forward/inverse S-Box ROMs achieving 1 block / 10 cycles with low LUT utilization and 0 BRAM / 0 DSP.</a:t>
+            </a:r>
+          </a:p>
+          <a:p>
+            <a:pPr marL="342900" indent="-342900">
               <a:buFont typeface="Wingdings" panose="05000000000000000000" pitchFamily="2" charset="2"/>
               <a:buChar char="Ø"/>
             </a:pPr>
             <a:r>
-              <a:rPr lang="en-US" sz="4000" dirty="0">
-                <a:solidFill>
-                  <a:srgbClr val="000000"/>
-                </a:solidFill>
-                <a:latin typeface="Times New Roman MT" panose="020B0604020202020204" charset="0"/>
-                <a:ea typeface="Times New Roman MT Bold"/>
-                <a:cs typeface="Times New Roman MT Bold"/>
-                <a:sym typeface="Times New Roman MT Bold"/>
-              </a:rPr>
-              <a:t>Targets 1AES block/10 clock cycles.</a:t>
-            </a:r>
-          </a:p>
-          <a:p>
-            <a:pPr marL="1123543" lvl="1" indent="-571500" algn="l">
-              <a:lnSpc>
-                <a:spcPts val="7159"/>
-              </a:lnSpc>
+              <a:rPr lang="en-GB" sz="2800" dirty="0"/>
+              <a:t>Full AXI4-MM System Interface: Full memory-mapped slave supporting single and 4-beat burst transfers (INCR), ID reflection, and backpressure handshakes.</a:t>
+            </a:r>
+          </a:p>
+          <a:p>
+            <a:pPr marL="342900" indent="-342900">
               <a:buFont typeface="Wingdings" panose="05000000000000000000" pitchFamily="2" charset="2"/>
               <a:buChar char="Ø"/>
             </a:pPr>
             <a:r>
-              <a:rPr lang="en-US" sz="4000" dirty="0">
-                <a:solidFill>
-                  <a:srgbClr val="000000"/>
-                </a:solidFill>
-                <a:latin typeface="Times New Roman MT" panose="020B0604020202020204" charset="0"/>
-                <a:ea typeface="Times New Roman MT Bold"/>
-                <a:cs typeface="Times New Roman MT Bold"/>
-                <a:sym typeface="Times New Roman MT Bold"/>
-              </a:rPr>
-              <a:t>Prevents key and intermediate state leakage through AXI-MM.</a:t>
+              <a:rPr lang="en-GB" sz="2800" dirty="0"/>
+              <a:t>Cryptographic Isolation Boundary: Write-only key registers, gated outputs during computation, and strict isolation preventing bus probing or state leakage.</a:t>
             </a:r>
           </a:p>
         </p:txBody>
       </p:sp>
     </p:spTree>
+    <p:extLst>
+      <p:ext uri="{BB962C8B-B14F-4D97-AF65-F5344CB8AC3E}">
+        <p14:creationId xmlns:p14="http://schemas.microsoft.com/office/powerpoint/2010/main" val="1491258336"/>
+      </p:ext>
+    </p:extLst>
   </p:cSld>
   <p:clrMapOvr>
     <a:masterClrMapping/>
@@ -5265,7 +5396,13 @@
     </p:bg>
     <p:spTree>
       <p:nvGrpSpPr>
-        <p:cNvPr id="1" name=""/>
+        <p:cNvPr id="1" name="">
+          <a:extLst>
+            <a:ext uri="{FF2B5EF4-FFF2-40B4-BE49-F238E27FC236}">
+              <a16:creationId xmlns:a16="http://schemas.microsoft.com/office/drawing/2014/main" id="{2297F162-BC38-3A50-37F0-12BE219348D6}"/>
+            </a:ext>
+          </a:extLst>
+        </p:cNvPr>
         <p:cNvGrpSpPr/>
         <p:nvPr/>
       </p:nvGrpSpPr>
@@ -5279,7 +5416,13 @@
       </p:grpSpPr>
       <p:sp>
         <p:nvSpPr>
-          <p:cNvPr id="2" name="TextBox 2"/>
+          <p:cNvPr id="2" name="TextBox 2">
+            <a:extLst>
+              <a:ext uri="{FF2B5EF4-FFF2-40B4-BE49-F238E27FC236}">
+                <a16:creationId xmlns:a16="http://schemas.microsoft.com/office/drawing/2014/main" id="{E1D6D588-38D4-29F6-AEA7-5887ED720306}"/>
+              </a:ext>
+            </a:extLst>
+          </p:cNvPr>
           <p:cNvSpPr txBox="1"/>
           <p:nvPr/>
         </p:nvSpPr>
@@ -5309,21 +5452,27 @@
       </p:sp>
       <p:sp>
         <p:nvSpPr>
-          <p:cNvPr id="3" name="TextBox 3"/>
+          <p:cNvPr id="3" name="TextBox 3">
+            <a:extLst>
+              <a:ext uri="{FF2B5EF4-FFF2-40B4-BE49-F238E27FC236}">
+                <a16:creationId xmlns:a16="http://schemas.microsoft.com/office/drawing/2014/main" id="{D6A64F7A-7DE7-709C-0B18-75D5EA7A051B}"/>
+              </a:ext>
+            </a:extLst>
+          </p:cNvPr>
           <p:cNvSpPr txBox="1"/>
           <p:nvPr/>
         </p:nvSpPr>
         <p:spPr>
           <a:xfrm>
-            <a:off x="11330294" y="3601951"/>
-            <a:ext cx="1739141" cy="1042905"/>
+            <a:off x="6188546" y="2213504"/>
+            <a:ext cx="10647198" cy="5716322"/>
           </a:xfrm>
           <a:prstGeom prst="rect">
             <a:avLst/>
           </a:prstGeom>
         </p:spPr>
         <p:txBody>
-          <a:bodyPr lIns="0" tIns="0" rIns="0" bIns="0" rtlCol="0" anchor="t">
+          <a:bodyPr wrap="square" lIns="0" tIns="0" rIns="0" bIns="0" rtlCol="0" anchor="t">
             <a:spAutoFit/>
           </a:bodyPr>
           <a:lstStyle/>
@@ -5339,7 +5488,13 @@
       </p:sp>
       <p:sp>
         <p:nvSpPr>
-          <p:cNvPr id="4" name="Freeform 4"/>
+          <p:cNvPr id="4" name="Freeform 4">
+            <a:extLst>
+              <a:ext uri="{FF2B5EF4-FFF2-40B4-BE49-F238E27FC236}">
+                <a16:creationId xmlns:a16="http://schemas.microsoft.com/office/drawing/2014/main" id="{B2CF4EFC-D350-0F52-CCD1-FF17D80933FB}"/>
+              </a:ext>
+            </a:extLst>
+          </p:cNvPr>
           <p:cNvSpPr/>
           <p:nvPr/>
         </p:nvSpPr>
@@ -5392,7 +5547,13 @@
       </p:sp>
       <p:sp>
         <p:nvSpPr>
-          <p:cNvPr id="5" name="Freeform 5"/>
+          <p:cNvPr id="5" name="Freeform 5">
+            <a:extLst>
+              <a:ext uri="{FF2B5EF4-FFF2-40B4-BE49-F238E27FC236}">
+                <a16:creationId xmlns:a16="http://schemas.microsoft.com/office/drawing/2014/main" id="{24F98411-0A51-CE76-0D5B-9777AA3B26D7}"/>
+              </a:ext>
+            </a:extLst>
+          </p:cNvPr>
           <p:cNvSpPr/>
           <p:nvPr/>
         </p:nvSpPr>
@@ -5445,7 +5606,13 @@
       </p:sp>
       <p:sp>
         <p:nvSpPr>
-          <p:cNvPr id="6" name="Freeform 6"/>
+          <p:cNvPr id="6" name="Freeform 6">
+            <a:extLst>
+              <a:ext uri="{FF2B5EF4-FFF2-40B4-BE49-F238E27FC236}">
+                <a16:creationId xmlns:a16="http://schemas.microsoft.com/office/drawing/2014/main" id="{78E44C0A-37B1-58EF-FA14-41B01273E612}"/>
+              </a:ext>
+            </a:extLst>
+          </p:cNvPr>
           <p:cNvSpPr/>
           <p:nvPr/>
         </p:nvSpPr>
@@ -5505,7 +5672,13 @@
       </p:sp>
       <p:sp>
         <p:nvSpPr>
-          <p:cNvPr id="7" name="Freeform 7"/>
+          <p:cNvPr id="7" name="Freeform 7">
+            <a:extLst>
+              <a:ext uri="{FF2B5EF4-FFF2-40B4-BE49-F238E27FC236}">
+                <a16:creationId xmlns:a16="http://schemas.microsoft.com/office/drawing/2014/main" id="{07AAD158-FA15-8B97-8332-A4EAA5BEB66E}"/>
+              </a:ext>
+            </a:extLst>
+          </p:cNvPr>
           <p:cNvSpPr/>
           <p:nvPr/>
         </p:nvSpPr>
@@ -5558,7 +5731,13 @@
       </p:sp>
       <p:sp>
         <p:nvSpPr>
-          <p:cNvPr id="8" name="Freeform 8"/>
+          <p:cNvPr id="8" name="Freeform 8">
+            <a:extLst>
+              <a:ext uri="{FF2B5EF4-FFF2-40B4-BE49-F238E27FC236}">
+                <a16:creationId xmlns:a16="http://schemas.microsoft.com/office/drawing/2014/main" id="{A33C2F7D-FE8B-9CB6-2B81-D4C7AAB0BE7D}"/>
+              </a:ext>
+            </a:extLst>
+          </p:cNvPr>
           <p:cNvSpPr/>
           <p:nvPr/>
         </p:nvSpPr>
@@ -5611,7 +5790,13 @@
       </p:sp>
       <p:sp>
         <p:nvSpPr>
-          <p:cNvPr id="9" name="Freeform 9"/>
+          <p:cNvPr id="9" name="Freeform 9">
+            <a:extLst>
+              <a:ext uri="{FF2B5EF4-FFF2-40B4-BE49-F238E27FC236}">
+                <a16:creationId xmlns:a16="http://schemas.microsoft.com/office/drawing/2014/main" id="{5EEF3640-6D82-0360-FA6E-B60B0F17C0FE}"/>
+              </a:ext>
+            </a:extLst>
+          </p:cNvPr>
           <p:cNvSpPr/>
           <p:nvPr/>
         </p:nvSpPr>
@@ -5664,7 +5849,13 @@
       </p:sp>
       <p:sp>
         <p:nvSpPr>
-          <p:cNvPr id="10" name="TextBox 10"/>
+          <p:cNvPr id="10" name="TextBox 10">
+            <a:extLst>
+              <a:ext uri="{FF2B5EF4-FFF2-40B4-BE49-F238E27FC236}">
+                <a16:creationId xmlns:a16="http://schemas.microsoft.com/office/drawing/2014/main" id="{372BFD8C-7D99-51A9-A666-89C675C17E2A}"/>
+              </a:ext>
+            </a:extLst>
+          </p:cNvPr>
           <p:cNvSpPr txBox="1"/>
           <p:nvPr/>
         </p:nvSpPr>
@@ -5756,10 +5947,10 @@
       </p:sp>
       <p:pic>
         <p:nvPicPr>
-          <p:cNvPr id="12" name="Picture 11">
+          <p:cNvPr id="13" name="Picture 12">
             <a:extLst>
               <a:ext uri="{FF2B5EF4-FFF2-40B4-BE49-F238E27FC236}">
-                <a16:creationId xmlns:a16="http://schemas.microsoft.com/office/drawing/2014/main" id="{680E9A08-F809-3666-79C9-271CBD5CAA6B}"/>
+                <a16:creationId xmlns:a16="http://schemas.microsoft.com/office/drawing/2014/main" id="{3C228938-DC77-B1B3-7EA9-217AD72ECB24}"/>
               </a:ext>
             </a:extLst>
           </p:cNvPr>
@@ -5769,21 +5960,15 @@
           <p:nvPr/>
         </p:nvPicPr>
         <p:blipFill>
-          <a:blip r:embed="rId7">
-            <a:extLst>
-              <a:ext uri="{28A0092B-C50C-407E-A947-70E740481C1C}">
-                <a14:useLocalDpi xmlns:a14="http://schemas.microsoft.com/office/drawing/2010/main" val="0"/>
-              </a:ext>
-            </a:extLst>
-          </a:blip>
+          <a:blip r:embed="rId7"/>
           <a:stretch>
             <a:fillRect/>
           </a:stretch>
         </p:blipFill>
         <p:spPr>
           <a:xfrm>
-            <a:off x="5791200" y="1714500"/>
-            <a:ext cx="12496800" cy="8572500"/>
+            <a:off x="5759800" y="1714500"/>
+            <a:ext cx="12515859" cy="8572500"/>
           </a:xfrm>
           <a:prstGeom prst="rect">
             <a:avLst/>
@@ -5791,6 +5976,11 @@
         </p:spPr>
       </p:pic>
     </p:spTree>
+    <p:extLst>
+      <p:ext uri="{BB962C8B-B14F-4D97-AF65-F5344CB8AC3E}">
+        <p14:creationId xmlns:p14="http://schemas.microsoft.com/office/powerpoint/2010/main" val="4253906632"/>
+      </p:ext>
+    </p:extLst>
   </p:cSld>
   <p:clrMapOvr>
     <a:masterClrMapping/>
@@ -5832,14 +6022,14 @@
         <p:spPr>
           <a:xfrm>
             <a:off x="5218565" y="3601951"/>
-            <a:ext cx="1739141" cy="1042905"/>
+            <a:ext cx="5906635" cy="1042905"/>
           </a:xfrm>
           <a:prstGeom prst="rect">
             <a:avLst/>
           </a:prstGeom>
         </p:spPr>
         <p:txBody>
-          <a:bodyPr lIns="0" tIns="0" rIns="0" bIns="0" rtlCol="0" anchor="t">
+          <a:bodyPr wrap="square" lIns="0" tIns="0" rIns="0" bIns="0" rtlCol="0" anchor="t">
             <a:spAutoFit/>
           </a:bodyPr>
           <a:lstStyle/>
@@ -6216,8 +6406,8 @@
         </p:nvSpPr>
         <p:spPr>
           <a:xfrm>
-            <a:off x="152400" y="1687948"/>
-            <a:ext cx="18433195" cy="10228569"/>
+            <a:off x="381000" y="1563006"/>
+            <a:ext cx="18433195" cy="1892954"/>
           </a:xfrm>
           <a:prstGeom prst="rect">
             <a:avLst/>
@@ -6228,362 +6418,6 @@
             <a:spAutoFit/>
           </a:bodyPr>
           <a:lstStyle/>
-          <a:p>
-            <a:pPr algn="l">
-              <a:lnSpc>
-                <a:spcPts val="5001"/>
-              </a:lnSpc>
-            </a:pPr>
-            <a:r>
-              <a:rPr lang="en-US" sz="3572" dirty="0">
-                <a:solidFill>
-                  <a:srgbClr val="000000"/>
-                </a:solidFill>
-                <a:latin typeface="Horizon"/>
-                <a:ea typeface="Horizon"/>
-                <a:cs typeface="Horizon"/>
-                <a:sym typeface="Horizon"/>
-              </a:rPr>
-              <a:t>Purpose of Blocks                          </a:t>
-            </a:r>
-          </a:p>
-          <a:p>
-            <a:pPr marL="285750" indent="-285750">
-              <a:lnSpc>
-                <a:spcPts val="5001"/>
-              </a:lnSpc>
-              <a:buFont typeface="Wingdings" panose="05000000000000000000" pitchFamily="2" charset="2"/>
-              <a:buChar char="Ø"/>
-            </a:pPr>
-            <a:r>
-              <a:rPr lang="en-US" sz="3200" dirty="0">
-                <a:solidFill>
-                  <a:srgbClr val="000000"/>
-                </a:solidFill>
-                <a:latin typeface="Times New Roman MT" panose="020B0604020202020204" charset="0"/>
-                <a:ea typeface="Horizon"/>
-                <a:cs typeface="Horizon"/>
-                <a:sym typeface="Horizon"/>
-              </a:rPr>
-              <a:t>AXI-MM Interface – Handles system data and control access.</a:t>
-            </a:r>
-          </a:p>
-          <a:p>
-            <a:pPr marL="285750" indent="-285750">
-              <a:lnSpc>
-                <a:spcPts val="5001"/>
-              </a:lnSpc>
-              <a:buFont typeface="Wingdings" panose="05000000000000000000" pitchFamily="2" charset="2"/>
-              <a:buChar char="Ø"/>
-            </a:pPr>
-            <a:r>
-              <a:rPr lang="en-US" sz="3200" dirty="0">
-                <a:solidFill>
-                  <a:srgbClr val="000000"/>
-                </a:solidFill>
-                <a:latin typeface="Times New Roman MT" panose="020B0604020202020204" charset="0"/>
-                <a:ea typeface="Horizon"/>
-                <a:cs typeface="Horizon"/>
-                <a:sym typeface="Horizon"/>
-              </a:rPr>
-              <a:t>AES Registers – Stores plaintext, key, control and final output.</a:t>
-            </a:r>
-          </a:p>
-          <a:p>
-            <a:pPr marL="285750" indent="-285750">
-              <a:lnSpc>
-                <a:spcPts val="5001"/>
-              </a:lnSpc>
-              <a:buFont typeface="Wingdings" panose="05000000000000000000" pitchFamily="2" charset="2"/>
-              <a:buChar char="Ø"/>
-            </a:pPr>
-            <a:r>
-              <a:rPr lang="en-US" sz="3200" dirty="0">
-                <a:solidFill>
-                  <a:srgbClr val="000000"/>
-                </a:solidFill>
-                <a:latin typeface="Times New Roman MT" panose="020B0604020202020204" charset="0"/>
-                <a:ea typeface="Horizon"/>
-                <a:cs typeface="Horizon"/>
-                <a:sym typeface="Horizon"/>
-              </a:rPr>
-              <a:t>AES Controller – Controls AES rounds and timing.</a:t>
-            </a:r>
-          </a:p>
-          <a:p>
-            <a:pPr marL="285750" indent="-285750">
-              <a:lnSpc>
-                <a:spcPts val="5001"/>
-              </a:lnSpc>
-              <a:buFont typeface="Wingdings" panose="05000000000000000000" pitchFamily="2" charset="2"/>
-              <a:buChar char="Ø"/>
-            </a:pPr>
-            <a:r>
-              <a:rPr lang="en-US" sz="3200" dirty="0">
-                <a:solidFill>
-                  <a:srgbClr val="000000"/>
-                </a:solidFill>
-                <a:latin typeface="Times New Roman MT" panose="020B0604020202020204" charset="0"/>
-                <a:ea typeface="Horizon"/>
-                <a:cs typeface="Horizon"/>
-                <a:sym typeface="Horizon"/>
-              </a:rPr>
-              <a:t>AES Datapath – Performs </a:t>
-            </a:r>
-            <a:r>
-              <a:rPr lang="en-US" sz="3200" dirty="0" err="1">
-                <a:solidFill>
-                  <a:srgbClr val="000000"/>
-                </a:solidFill>
-                <a:latin typeface="Times New Roman MT" panose="020B0604020202020204" charset="0"/>
-                <a:ea typeface="Horizon"/>
-                <a:cs typeface="Horizon"/>
-                <a:sym typeface="Horizon"/>
-              </a:rPr>
-              <a:t>SubBytes</a:t>
-            </a:r>
-            <a:r>
-              <a:rPr lang="en-US" sz="3200" dirty="0">
-                <a:solidFill>
-                  <a:srgbClr val="000000"/>
-                </a:solidFill>
-                <a:latin typeface="Times New Roman MT" panose="020B0604020202020204" charset="0"/>
-                <a:ea typeface="Horizon"/>
-                <a:cs typeface="Horizon"/>
-                <a:sym typeface="Horizon"/>
-              </a:rPr>
-              <a:t>, </a:t>
-            </a:r>
-            <a:r>
-              <a:rPr lang="en-US" sz="3200" dirty="0" err="1">
-                <a:solidFill>
-                  <a:srgbClr val="000000"/>
-                </a:solidFill>
-                <a:latin typeface="Times New Roman MT" panose="020B0604020202020204" charset="0"/>
-                <a:ea typeface="Horizon"/>
-                <a:cs typeface="Horizon"/>
-                <a:sym typeface="Horizon"/>
-              </a:rPr>
-              <a:t>ShiftRows</a:t>
-            </a:r>
-            <a:r>
-              <a:rPr lang="en-US" sz="3200" dirty="0">
-                <a:solidFill>
-                  <a:srgbClr val="000000"/>
-                </a:solidFill>
-                <a:latin typeface="Times New Roman MT" panose="020B0604020202020204" charset="0"/>
-                <a:ea typeface="Horizon"/>
-                <a:cs typeface="Horizon"/>
-                <a:sym typeface="Horizon"/>
-              </a:rPr>
-              <a:t>, </a:t>
-            </a:r>
-            <a:r>
-              <a:rPr lang="en-US" sz="3200" dirty="0" err="1">
-                <a:solidFill>
-                  <a:srgbClr val="000000"/>
-                </a:solidFill>
-                <a:latin typeface="Times New Roman MT" panose="020B0604020202020204" charset="0"/>
-                <a:ea typeface="Horizon"/>
-                <a:cs typeface="Horizon"/>
-                <a:sym typeface="Horizon"/>
-              </a:rPr>
-              <a:t>MixColumns</a:t>
-            </a:r>
-            <a:r>
-              <a:rPr lang="en-US" sz="3200" dirty="0">
-                <a:solidFill>
-                  <a:srgbClr val="000000"/>
-                </a:solidFill>
-                <a:latin typeface="Times New Roman MT" panose="020B0604020202020204" charset="0"/>
-                <a:ea typeface="Horizon"/>
-                <a:cs typeface="Horizon"/>
-                <a:sym typeface="Horizon"/>
-              </a:rPr>
-              <a:t> and </a:t>
-            </a:r>
-            <a:r>
-              <a:rPr lang="en-US" sz="3200" dirty="0" err="1">
-                <a:solidFill>
-                  <a:srgbClr val="000000"/>
-                </a:solidFill>
-                <a:latin typeface="Times New Roman MT" panose="020B0604020202020204" charset="0"/>
-                <a:ea typeface="Horizon"/>
-                <a:cs typeface="Horizon"/>
-                <a:sym typeface="Horizon"/>
-              </a:rPr>
-              <a:t>AddRoundKey</a:t>
-            </a:r>
-            <a:r>
-              <a:rPr lang="en-US" sz="3200" dirty="0">
-                <a:solidFill>
-                  <a:srgbClr val="000000"/>
-                </a:solidFill>
-                <a:latin typeface="Times New Roman MT" panose="020B0604020202020204" charset="0"/>
-                <a:ea typeface="Horizon"/>
-                <a:cs typeface="Horizon"/>
-                <a:sym typeface="Horizon"/>
-              </a:rPr>
-              <a:t>.</a:t>
-            </a:r>
-          </a:p>
-          <a:p>
-            <a:pPr marL="285750" indent="-285750">
-              <a:lnSpc>
-                <a:spcPts val="5001"/>
-              </a:lnSpc>
-              <a:buFont typeface="Wingdings" panose="05000000000000000000" pitchFamily="2" charset="2"/>
-              <a:buChar char="Ø"/>
-            </a:pPr>
-            <a:r>
-              <a:rPr lang="en-US" sz="3200" dirty="0">
-                <a:solidFill>
-                  <a:srgbClr val="000000"/>
-                </a:solidFill>
-                <a:latin typeface="Times New Roman MT" panose="020B0604020202020204" charset="0"/>
-                <a:ea typeface="Horizon"/>
-                <a:cs typeface="Horizon"/>
-                <a:sym typeface="Horizon"/>
-              </a:rPr>
-              <a:t>Key Expansion – Generates round keys on-the-fly.</a:t>
-            </a:r>
-          </a:p>
-          <a:p>
-            <a:pPr marL="285750" indent="-285750">
-              <a:lnSpc>
-                <a:spcPts val="5001"/>
-              </a:lnSpc>
-              <a:buFont typeface="Wingdings" panose="05000000000000000000" pitchFamily="2" charset="2"/>
-              <a:buChar char="Ø"/>
-            </a:pPr>
-            <a:r>
-              <a:rPr lang="en-US" sz="3200" dirty="0">
-                <a:solidFill>
-                  <a:srgbClr val="000000"/>
-                </a:solidFill>
-                <a:latin typeface="Times New Roman MT" panose="020B0604020202020204" charset="0"/>
-                <a:ea typeface="Horizon"/>
-                <a:cs typeface="Horizon"/>
-                <a:sym typeface="Horizon"/>
-              </a:rPr>
-              <a:t>Output Block – Provides the final 128-bit encrypted/decrypted data</a:t>
-            </a:r>
-            <a:r>
-              <a:rPr lang="en-US" dirty="0">
-                <a:solidFill>
-                  <a:srgbClr val="000000"/>
-                </a:solidFill>
-                <a:latin typeface="Times New Roman MT" panose="020B0604020202020204" charset="0"/>
-                <a:ea typeface="Horizon"/>
-                <a:cs typeface="Horizon"/>
-                <a:sym typeface="Horizon"/>
-              </a:rPr>
-              <a:t>.</a:t>
-            </a:r>
-          </a:p>
-          <a:p>
-            <a:pPr>
-              <a:lnSpc>
-                <a:spcPts val="5001"/>
-              </a:lnSpc>
-            </a:pPr>
-            <a:r>
-              <a:rPr lang="en-US" sz="3600" b="1" dirty="0">
-                <a:solidFill>
-                  <a:srgbClr val="000000"/>
-                </a:solidFill>
-                <a:latin typeface="Horizon" panose="020B0604020202020204" charset="0"/>
-                <a:ea typeface="Horizon"/>
-                <a:cs typeface="Horizon"/>
-                <a:sym typeface="Horizon"/>
-              </a:rPr>
-              <a:t>Architecture trade-off</a:t>
-            </a:r>
-          </a:p>
-          <a:p>
-            <a:pPr marL="457200" indent="-457200">
-              <a:lnSpc>
-                <a:spcPts val="5001"/>
-              </a:lnSpc>
-              <a:buFont typeface="Wingdings" panose="05000000000000000000" pitchFamily="2" charset="2"/>
-              <a:buChar char="Ø"/>
-            </a:pPr>
-            <a:r>
-              <a:rPr lang="en-US" sz="3200" dirty="0">
-                <a:solidFill>
-                  <a:srgbClr val="000000"/>
-                </a:solidFill>
-                <a:latin typeface="Times New Roman MT" panose="020B0604020202020204" charset="0"/>
-                <a:ea typeface="Horizon"/>
-                <a:cs typeface="Horizon"/>
-                <a:sym typeface="Horizon"/>
-              </a:rPr>
-              <a:t>Resource sharing – Lower LUT usage.</a:t>
-            </a:r>
-          </a:p>
-          <a:p>
-            <a:pPr marL="457200" indent="-457200">
-              <a:lnSpc>
-                <a:spcPts val="5001"/>
-              </a:lnSpc>
-              <a:buFont typeface="Wingdings" panose="05000000000000000000" pitchFamily="2" charset="2"/>
-              <a:buChar char="Ø"/>
-            </a:pPr>
-            <a:r>
-              <a:rPr lang="en-US" sz="3200" dirty="0">
-                <a:solidFill>
-                  <a:srgbClr val="000000"/>
-                </a:solidFill>
-                <a:latin typeface="Times New Roman MT" panose="020B0604020202020204" charset="0"/>
-                <a:ea typeface="Horizon"/>
-                <a:cs typeface="Horizon"/>
-                <a:sym typeface="Horizon"/>
-              </a:rPr>
-              <a:t>Pipeline folding – High throughput.</a:t>
-            </a:r>
-          </a:p>
-          <a:p>
-            <a:pPr marL="457200" indent="-457200">
-              <a:lnSpc>
-                <a:spcPts val="5001"/>
-              </a:lnSpc>
-              <a:buFont typeface="Wingdings" panose="05000000000000000000" pitchFamily="2" charset="2"/>
-              <a:buChar char="Ø"/>
-            </a:pPr>
-            <a:r>
-              <a:rPr lang="en-US" sz="3200" dirty="0">
-                <a:solidFill>
-                  <a:srgbClr val="000000"/>
-                </a:solidFill>
-                <a:latin typeface="Times New Roman MT" panose="020B0604020202020204" charset="0"/>
-                <a:ea typeface="Horizon"/>
-                <a:cs typeface="Horizon"/>
-                <a:sym typeface="Horizon"/>
-              </a:rPr>
-              <a:t>On-the-fly keys – less memory &amp; better security.</a:t>
-            </a:r>
-          </a:p>
-          <a:p>
-            <a:pPr marL="457200" indent="-457200">
-              <a:lnSpc>
-                <a:spcPts val="5001"/>
-              </a:lnSpc>
-              <a:buFont typeface="Wingdings" panose="05000000000000000000" pitchFamily="2" charset="2"/>
-              <a:buChar char="Ø"/>
-            </a:pPr>
-            <a:r>
-              <a:rPr lang="en-US" sz="3200" dirty="0">
-                <a:solidFill>
-                  <a:srgbClr val="000000"/>
-                </a:solidFill>
-                <a:latin typeface="Times New Roman MT" panose="020B0604020202020204" charset="0"/>
-                <a:ea typeface="Horizon"/>
-                <a:cs typeface="Horizon"/>
-                <a:sym typeface="Horizon"/>
-              </a:rPr>
-              <a:t>Secure AXI-MM – Prevents key/state leakage.</a:t>
-            </a:r>
-          </a:p>
           <a:p>
             <a:pPr algn="ctr">
               <a:lnSpc>
@@ -6622,22 +6456,6 @@
                 <a:spcPts val="5001"/>
               </a:lnSpc>
             </a:pPr>
-            <a:endParaRPr lang="en-US" dirty="0">
-              <a:solidFill>
-                <a:srgbClr val="000000"/>
-              </a:solidFill>
-              <a:latin typeface="Times New Roman MT"/>
-              <a:ea typeface="Times New Roman MT"/>
-              <a:cs typeface="Times New Roman MT"/>
-              <a:sym typeface="Times New Roman MT"/>
-            </a:endParaRPr>
-          </a:p>
-          <a:p>
-            <a:pPr algn="ctr">
-              <a:lnSpc>
-                <a:spcPts val="5001"/>
-              </a:lnSpc>
-            </a:pPr>
             <a:endParaRPr lang="en-US" sz="3572" dirty="0">
               <a:solidFill>
                 <a:srgbClr val="000000"/>
@@ -6647,6 +6465,345 @@
               <a:cs typeface="Times New Roman MT"/>
               <a:sym typeface="Times New Roman MT"/>
             </a:endParaRPr>
+          </a:p>
+        </p:txBody>
+      </p:sp>
+      <p:sp>
+        <p:nvSpPr>
+          <p:cNvPr id="15" name="TextBox 14">
+            <a:extLst>
+              <a:ext uri="{FF2B5EF4-FFF2-40B4-BE49-F238E27FC236}">
+                <a16:creationId xmlns:a16="http://schemas.microsoft.com/office/drawing/2014/main" id="{5CA5C933-88E3-9968-6297-E6B43D7AA12B}"/>
+              </a:ext>
+            </a:extLst>
+          </p:cNvPr>
+          <p:cNvSpPr txBox="1"/>
+          <p:nvPr/>
+        </p:nvSpPr>
+        <p:spPr>
+          <a:xfrm>
+            <a:off x="1346714" y="1920187"/>
+            <a:ext cx="15471824" cy="7848302"/>
+          </a:xfrm>
+          <a:prstGeom prst="rect">
+            <a:avLst/>
+          </a:prstGeom>
+          <a:noFill/>
+        </p:spPr>
+        <p:txBody>
+          <a:bodyPr wrap="square" rtlCol="0">
+            <a:spAutoFit/>
+          </a:bodyPr>
+          <a:lstStyle/>
+          <a:p>
+            <a:r>
+              <a:rPr lang="en-GB" sz="2400" b="1" dirty="0">
+                <a:latin typeface="Horizon" panose="020B0604020202020204" charset="0"/>
+              </a:rPr>
+              <a:t>Purpose of Blocks</a:t>
+            </a:r>
+          </a:p>
+          <a:p>
+            <a:endParaRPr lang="en-GB" sz="2400" b="1" dirty="0">
+              <a:latin typeface="Times New Roman MT" panose="020B0604020202020204" charset="0"/>
+            </a:endParaRPr>
+          </a:p>
+          <a:p>
+            <a:pPr marL="342900" indent="-342900">
+              <a:buFont typeface="Wingdings" panose="05000000000000000000" pitchFamily="2" charset="2"/>
+              <a:buChar char="Ø"/>
+            </a:pPr>
+            <a:r>
+              <a:rPr lang="en-GB" sz="2400" b="1" dirty="0">
+                <a:latin typeface="Times New Roman MT" panose="020B0604020202020204" charset="0"/>
+              </a:rPr>
+              <a:t>Full AXI4-MM Interface (</a:t>
+            </a:r>
+            <a:r>
+              <a:rPr lang="en-GB" sz="2400" b="1" dirty="0" err="1">
+                <a:latin typeface="Times New Roman MT" panose="020B0604020202020204" charset="0"/>
+              </a:rPr>
+              <a:t>axi_mm_slave.v</a:t>
+            </a:r>
+            <a:r>
+              <a:rPr lang="en-GB" sz="2400" b="1" dirty="0">
+                <a:latin typeface="Times New Roman MT" panose="020B0604020202020204" charset="0"/>
+              </a:rPr>
+              <a:t>): </a:t>
+            </a:r>
+            <a:r>
+              <a:rPr lang="en-GB" sz="2400" dirty="0">
+                <a:latin typeface="Times New Roman MT" panose="020B0604020202020204" charset="0"/>
+              </a:rPr>
+              <a:t>Handles single/burst read/write transactions (INCR/FIXED), transaction IDs, and bus handshaking.</a:t>
+            </a:r>
+          </a:p>
+          <a:p>
+            <a:pPr marL="342900" indent="-342900">
+              <a:buFont typeface="Wingdings" panose="05000000000000000000" pitchFamily="2" charset="2"/>
+              <a:buChar char="Ø"/>
+            </a:pPr>
+            <a:r>
+              <a:rPr lang="en-GB" sz="2400" b="1" dirty="0">
+                <a:latin typeface="Times New Roman MT" panose="020B0604020202020204" charset="0"/>
+              </a:rPr>
+              <a:t>Cryptographic Isolation Boundary (</a:t>
+            </a:r>
+            <a:r>
+              <a:rPr lang="en-GB" sz="2400" b="1" dirty="0" err="1">
+                <a:latin typeface="Times New Roman MT" panose="020B0604020202020204" charset="0"/>
+              </a:rPr>
+              <a:t>aes_registers.v</a:t>
+            </a:r>
+            <a:r>
+              <a:rPr lang="en-GB" sz="2400" b="1" dirty="0">
+                <a:latin typeface="Times New Roman MT" panose="020B0604020202020204" charset="0"/>
+              </a:rPr>
+              <a:t>): </a:t>
+            </a:r>
+            <a:r>
+              <a:rPr lang="en-GB" sz="2400" dirty="0">
+                <a:latin typeface="Times New Roman MT" panose="020B0604020202020204" charset="0"/>
+              </a:rPr>
+              <a:t>Provides write-only key security (reads return 0x0000_0000) and masks ciphertext output until DONE == 1.</a:t>
+            </a:r>
+          </a:p>
+          <a:p>
+            <a:pPr marL="342900" indent="-342900">
+              <a:buFont typeface="Wingdings" panose="05000000000000000000" pitchFamily="2" charset="2"/>
+              <a:buChar char="Ø"/>
+            </a:pPr>
+            <a:r>
+              <a:rPr lang="en-GB" sz="2400" b="1" dirty="0">
+                <a:latin typeface="Times New Roman MT" panose="020B0604020202020204" charset="0"/>
+              </a:rPr>
+              <a:t>6-Mode &amp; Padding Subsystem (</a:t>
+            </a:r>
+            <a:r>
+              <a:rPr lang="en-GB" sz="2400" b="1" dirty="0" err="1">
+                <a:latin typeface="Times New Roman MT" panose="020B0604020202020204" charset="0"/>
+              </a:rPr>
+              <a:t>aes_mode_engine.v</a:t>
+            </a:r>
+            <a:r>
+              <a:rPr lang="en-GB" sz="2400" b="1" dirty="0">
+                <a:latin typeface="Times New Roman MT" panose="020B0604020202020204" charset="0"/>
+              </a:rPr>
+              <a:t> + </a:t>
+            </a:r>
+            <a:r>
+              <a:rPr lang="en-GB" sz="2400" b="1" dirty="0" err="1">
+                <a:latin typeface="Times New Roman MT" panose="020B0604020202020204" charset="0"/>
+              </a:rPr>
+              <a:t>ghash_core.v</a:t>
+            </a:r>
+            <a:r>
+              <a:rPr lang="en-GB" sz="2400" b="1" dirty="0">
+                <a:latin typeface="Times New Roman MT" panose="020B0604020202020204" charset="0"/>
+              </a:rPr>
+              <a:t>): </a:t>
+            </a:r>
+            <a:r>
+              <a:rPr lang="en-GB" sz="2400" dirty="0">
+                <a:latin typeface="Times New Roman MT" panose="020B0604020202020204" charset="0"/>
+              </a:rPr>
+              <a:t>Coordinates chaining (CBC/CFB/OFB), counter increments (CTR/GCM), GHASH authentication tag generation, and PKCS#5 padding.</a:t>
+            </a:r>
+          </a:p>
+          <a:p>
+            <a:pPr marL="342900" indent="-342900">
+              <a:buFont typeface="Wingdings" panose="05000000000000000000" pitchFamily="2" charset="2"/>
+              <a:buChar char="Ø"/>
+            </a:pPr>
+            <a:r>
+              <a:rPr lang="en-GB" sz="2400" b="1" dirty="0">
+                <a:latin typeface="Times New Roman MT" panose="020B0604020202020204" charset="0"/>
+              </a:rPr>
+              <a:t>Folded Datapath Engine (</a:t>
+            </a:r>
+            <a:r>
+              <a:rPr lang="en-GB" sz="2400" b="1" dirty="0" err="1">
+                <a:latin typeface="Times New Roman MT" panose="020B0604020202020204" charset="0"/>
+              </a:rPr>
+              <a:t>aes_core.v</a:t>
+            </a:r>
+            <a:r>
+              <a:rPr lang="en-GB" sz="2400" b="1" dirty="0">
+                <a:latin typeface="Times New Roman MT" panose="020B0604020202020204" charset="0"/>
+              </a:rPr>
+              <a:t>): </a:t>
+            </a:r>
+            <a:r>
+              <a:rPr lang="en-GB" sz="2400" dirty="0">
+                <a:latin typeface="Times New Roman MT" panose="020B0604020202020204" charset="0"/>
+              </a:rPr>
+              <a:t>Executes unified forward/inverse </a:t>
+            </a:r>
+            <a:r>
+              <a:rPr lang="en-GB" sz="2400" dirty="0" err="1">
+                <a:latin typeface="Times New Roman MT" panose="020B0604020202020204" charset="0"/>
+              </a:rPr>
+              <a:t>SubBytes</a:t>
+            </a:r>
+            <a:r>
+              <a:rPr lang="en-GB" sz="2400" dirty="0">
+                <a:latin typeface="Times New Roman MT" panose="020B0604020202020204" charset="0"/>
+              </a:rPr>
+              <a:t>, </a:t>
+            </a:r>
+            <a:r>
+              <a:rPr lang="en-GB" sz="2400" dirty="0" err="1">
+                <a:latin typeface="Times New Roman MT" panose="020B0604020202020204" charset="0"/>
+              </a:rPr>
+              <a:t>ShiftRows</a:t>
+            </a:r>
+            <a:r>
+              <a:rPr lang="en-GB" sz="2400" dirty="0">
+                <a:latin typeface="Times New Roman MT" panose="020B0604020202020204" charset="0"/>
+              </a:rPr>
+              <a:t>, </a:t>
+            </a:r>
+            <a:r>
+              <a:rPr lang="en-GB" sz="2400" dirty="0" err="1">
+                <a:latin typeface="Times New Roman MT" panose="020B0604020202020204" charset="0"/>
+              </a:rPr>
+              <a:t>MixColumns</a:t>
+            </a:r>
+            <a:r>
+              <a:rPr lang="en-GB" sz="2400" dirty="0">
+                <a:latin typeface="Times New Roman MT" panose="020B0604020202020204" charset="0"/>
+              </a:rPr>
+              <a:t>, and </a:t>
+            </a:r>
+            <a:r>
+              <a:rPr lang="en-GB" sz="2400" dirty="0" err="1">
+                <a:latin typeface="Times New Roman MT" panose="020B0604020202020204" charset="0"/>
+              </a:rPr>
+              <a:t>AddRoundKey</a:t>
+            </a:r>
+            <a:r>
+              <a:rPr lang="en-GB" sz="2400" dirty="0">
+                <a:latin typeface="Times New Roman MT" panose="020B0604020202020204" charset="0"/>
+              </a:rPr>
+              <a:t> iteratively in 10 clock cycles.</a:t>
+            </a:r>
+            <a:endParaRPr lang="en-GB" sz="2400" b="1" dirty="0">
+              <a:latin typeface="Times New Roman MT" panose="020B0604020202020204" charset="0"/>
+            </a:endParaRPr>
+          </a:p>
+          <a:p>
+            <a:pPr marL="342900" indent="-342900">
+              <a:buFont typeface="Wingdings" panose="05000000000000000000" pitchFamily="2" charset="2"/>
+              <a:buChar char="Ø"/>
+            </a:pPr>
+            <a:r>
+              <a:rPr lang="en-GB" sz="2400" dirty="0">
+                <a:latin typeface="Times New Roman MT" panose="020B0604020202020204" charset="0"/>
+              </a:rPr>
+              <a:t> </a:t>
+            </a:r>
+            <a:r>
+              <a:rPr lang="en-GB" sz="2400" b="1" dirty="0">
+                <a:latin typeface="Times New Roman MT" panose="020B0604020202020204" charset="0"/>
+              </a:rPr>
+              <a:t>On-the-Fly Key Generator: </a:t>
+            </a:r>
+            <a:r>
+              <a:rPr lang="en-GB" sz="2400" dirty="0">
+                <a:latin typeface="Times New Roman MT" panose="020B0604020202020204" charset="0"/>
+              </a:rPr>
+              <a:t>Generates the AES round keys K₁ to K₁₀ when needed, without storing them in BRAM, which saves hardware resources.</a:t>
+            </a:r>
+          </a:p>
+          <a:p>
+            <a:endParaRPr lang="en-GB" sz="2400" dirty="0">
+              <a:latin typeface="Times New Roman MT" panose="020B0604020202020204" charset="0"/>
+            </a:endParaRPr>
+          </a:p>
+          <a:p>
+            <a:r>
+              <a:rPr lang="en-GB" sz="2400" dirty="0">
+                <a:latin typeface="Horizon" panose="020B0604020202020204" charset="0"/>
+              </a:rPr>
+              <a:t>Architecture Trade-Offs</a:t>
+            </a:r>
+          </a:p>
+          <a:p>
+            <a:endParaRPr lang="en-GB" sz="2400" dirty="0">
+              <a:latin typeface="Times New Roman MT" panose="020B0604020202020204" charset="0"/>
+            </a:endParaRPr>
+          </a:p>
+          <a:p>
+            <a:pPr marL="342900" indent="-342900">
+              <a:buFont typeface="Wingdings" panose="05000000000000000000" pitchFamily="2" charset="2"/>
+              <a:buChar char="Ø"/>
+            </a:pPr>
+            <a:r>
+              <a:rPr lang="en-GB" sz="2400" b="1" dirty="0">
+                <a:latin typeface="Times New Roman MT" panose="020B0604020202020204" charset="0"/>
+              </a:rPr>
+              <a:t>Pipeline Folding vs. Full Unrolling</a:t>
+            </a:r>
+            <a:r>
+              <a:rPr lang="en-GB" sz="2400" dirty="0">
+                <a:latin typeface="Times New Roman MT" panose="020B0604020202020204" charset="0"/>
+              </a:rPr>
+              <a:t>: Achieves 1.28 Gbps throughput while reducing area by &gt;75% compared to unrolled 10-stage pipelines.</a:t>
+            </a:r>
+          </a:p>
+          <a:p>
+            <a:pPr marL="342900" indent="-342900">
+              <a:buFont typeface="Wingdings" panose="05000000000000000000" pitchFamily="2" charset="2"/>
+              <a:buChar char="Ø"/>
+            </a:pPr>
+            <a:r>
+              <a:rPr lang="en-GB" sz="2400" b="1" dirty="0">
+                <a:latin typeface="Times New Roman MT" panose="020B0604020202020204" charset="0"/>
+              </a:rPr>
+              <a:t>Full AXI4 Burst vs. AXI-Lite: </a:t>
+            </a:r>
+            <a:r>
+              <a:rPr lang="en-GB" sz="2400" dirty="0">
+                <a:latin typeface="Times New Roman MT" panose="020B0604020202020204" charset="0"/>
+              </a:rPr>
+              <a:t>Enables 4-word burst transfers, eliminating bus turnaround overhead and saturating </a:t>
+            </a:r>
+            <a:r>
+              <a:rPr lang="en-GB" sz="2400" dirty="0" err="1">
+                <a:latin typeface="Times New Roman MT" panose="020B0604020202020204" charset="0"/>
+              </a:rPr>
+              <a:t>datapath</a:t>
+            </a:r>
+            <a:r>
+              <a:rPr lang="en-GB" sz="2400" dirty="0">
+                <a:latin typeface="Times New Roman MT" panose="020B0604020202020204" charset="0"/>
+              </a:rPr>
+              <a:t> throughput.</a:t>
+            </a:r>
+          </a:p>
+          <a:p>
+            <a:pPr marL="342900" indent="-342900">
+              <a:buFont typeface="Wingdings" panose="05000000000000000000" pitchFamily="2" charset="2"/>
+              <a:buChar char="Ø"/>
+            </a:pPr>
+            <a:r>
+              <a:rPr lang="en-GB" sz="2400" b="1" dirty="0">
+                <a:latin typeface="Times New Roman MT" panose="020B0604020202020204" charset="0"/>
+              </a:rPr>
+              <a:t>Shared S-Box Architecture: </a:t>
+            </a:r>
+            <a:r>
+              <a:rPr lang="en-GB" sz="2400" dirty="0">
+                <a:latin typeface="Times New Roman MT" panose="020B0604020202020204" charset="0"/>
+              </a:rPr>
+              <a:t>Unifies forward and inverse S-boxes into shared distributed ROMs with MuxF7/F8 cascades to minimize slice footprint</a:t>
+            </a:r>
+            <a:r>
+              <a:rPr lang="en-GB" dirty="0">
+                <a:latin typeface="Times New Roman MT" panose="020B0604020202020204" charset="0"/>
+              </a:rPr>
+              <a:t>.</a:t>
+            </a:r>
           </a:p>
         </p:txBody>
       </p:sp>
@@ -6751,7 +6908,7 @@
         </p:nvSpPr>
         <p:spPr>
           <a:xfrm>
-            <a:off x="4600883" y="-456041"/>
+            <a:off x="4620548" y="-521582"/>
             <a:ext cx="8641637" cy="2621955"/>
           </a:xfrm>
           <a:custGeom>
@@ -7070,348 +7227,248 @@
       </p:sp>
       <p:sp>
         <p:nvSpPr>
-          <p:cNvPr id="10" name="TextBox 10"/>
+          <p:cNvPr id="11" name="TextBox 10">
+            <a:extLst>
+              <a:ext uri="{FF2B5EF4-FFF2-40B4-BE49-F238E27FC236}">
+                <a16:creationId xmlns:a16="http://schemas.microsoft.com/office/drawing/2014/main" id="{1F90F034-3029-D1A9-C2D2-A770A9A40591}"/>
+              </a:ext>
+            </a:extLst>
+          </p:cNvPr>
           <p:cNvSpPr txBox="1"/>
           <p:nvPr/>
         </p:nvSpPr>
         <p:spPr>
           <a:xfrm>
-            <a:off x="439089" y="3349724"/>
-            <a:ext cx="16372074" cy="5623591"/>
+            <a:off x="556996" y="2409735"/>
+            <a:ext cx="18135599" cy="6647974"/>
           </a:xfrm>
           <a:prstGeom prst="rect">
             <a:avLst/>
           </a:prstGeom>
-        </p:spPr>
-        <p:txBody>
-          <a:bodyPr lIns="0" tIns="0" rIns="0" bIns="0" rtlCol="0" anchor="t">
+          <a:noFill/>
+        </p:spPr>
+        <p:txBody>
+          <a:bodyPr wrap="square" rtlCol="0">
             <a:spAutoFit/>
           </a:bodyPr>
           <a:lstStyle/>
           <a:p>
-            <a:pPr algn="ctr">
-              <a:lnSpc>
-                <a:spcPts val="4442"/>
-              </a:lnSpc>
+            <a:r>
+              <a:rPr lang="en-GB" dirty="0"/>
+              <a:t> </a:t>
+            </a:r>
+            <a:r>
+              <a:rPr lang="en-GB" dirty="0">
+                <a:latin typeface="Horizon" panose="020B0604020202020204" charset="0"/>
+              </a:rPr>
+              <a:t>Outputs and </a:t>
+            </a:r>
+            <a:r>
+              <a:rPr lang="en-GB" dirty="0" err="1">
+                <a:latin typeface="Horizon" panose="020B0604020202020204" charset="0"/>
+              </a:rPr>
+              <a:t>ResultS</a:t>
+            </a:r>
+            <a:endParaRPr lang="en-GB" dirty="0"/>
+          </a:p>
+          <a:p>
+            <a:endParaRPr lang="en-GB" sz="2400" dirty="0">
+              <a:latin typeface="Times New Roman MT" panose="020B0604020202020204" charset="0"/>
+            </a:endParaRPr>
+          </a:p>
+          <a:p>
+            <a:r>
+              <a:rPr lang="en-GB" sz="2400" b="1" dirty="0">
+                <a:latin typeface="Times New Roman MT" panose="020B0604020202020204" charset="0"/>
+              </a:rPr>
+              <a:t>Post-Route Timing Closure</a:t>
+            </a:r>
+          </a:p>
+          <a:p>
+            <a:pPr marL="342900" indent="-342900">
+              <a:buFont typeface="Wingdings" panose="05000000000000000000" pitchFamily="2" charset="2"/>
+              <a:buChar char="Ø"/>
             </a:pPr>
             <a:r>
-              <a:rPr lang="en-US" sz="3172" dirty="0">
-                <a:solidFill>
-                  <a:srgbClr val="000000"/>
-                </a:solidFill>
-                <a:latin typeface="Horizon"/>
-                <a:ea typeface="Horizon"/>
-                <a:cs typeface="Horizon"/>
-                <a:sym typeface="Horizon"/>
-              </a:rPr>
-              <a:t>OUTPUTS AND RESULTS</a:t>
-            </a:r>
-          </a:p>
-          <a:p>
-            <a:pPr algn="ctr">
-              <a:lnSpc>
-                <a:spcPts val="4442"/>
-              </a:lnSpc>
+              <a:rPr lang="en-GB" sz="2400" dirty="0">
+                <a:latin typeface="Times New Roman MT" panose="020B0604020202020204" charset="0"/>
+              </a:rPr>
+              <a:t>The AES-128 core operates successfully at 100 MHz with positive WNS and WHS, achieving 100% timing closure with zero failing endpoints.</a:t>
+            </a:r>
+          </a:p>
+          <a:p>
+            <a:r>
+              <a:rPr lang="en-GB" sz="2400" b="1" dirty="0">
+                <a:latin typeface="Times New Roman MT" panose="020B0604020202020204" charset="0"/>
+              </a:rPr>
+              <a:t>High Throughput Performance</a:t>
+            </a:r>
+          </a:p>
+          <a:p>
+            <a:pPr marL="342900" indent="-342900">
+              <a:buFont typeface="Wingdings" panose="05000000000000000000" pitchFamily="2" charset="2"/>
+              <a:buChar char="Ø"/>
             </a:pPr>
-            <a:endParaRPr lang="en-US" sz="3172" dirty="0">
-              <a:solidFill>
-                <a:srgbClr val="000000"/>
-              </a:solidFill>
-              <a:latin typeface="Horizon"/>
-              <a:ea typeface="Horizon"/>
-              <a:cs typeface="Horizon"/>
-              <a:sym typeface="Horizon"/>
-            </a:endParaRPr>
-          </a:p>
-          <a:p>
-            <a:pPr algn="ctr">
-              <a:lnSpc>
-                <a:spcPts val="4442"/>
-              </a:lnSpc>
+            <a:r>
+              <a:rPr lang="en-GB" sz="2400" dirty="0">
+                <a:latin typeface="Times New Roman MT" panose="020B0604020202020204" charset="0"/>
+              </a:rPr>
+              <a:t>The core completes one 128-bit AES block in 10 clock cycles, achieving a sustained throughput of 1.28 Gbps.</a:t>
+            </a:r>
+          </a:p>
+          <a:p>
+            <a:r>
+              <a:rPr lang="en-GB" sz="2400" b="1" dirty="0">
+                <a:latin typeface="Times New Roman MT" panose="020B0604020202020204" charset="0"/>
+              </a:rPr>
+              <a:t>Ultra-Compact Resource Utilization</a:t>
+            </a:r>
+          </a:p>
+          <a:p>
+            <a:pPr marL="342900" indent="-342900">
+              <a:buFont typeface="Wingdings" panose="05000000000000000000" pitchFamily="2" charset="2"/>
+              <a:buChar char="Ø"/>
             </a:pPr>
             <a:r>
-              <a:rPr lang="en-US" sz="3172" b="1" dirty="0">
-                <a:solidFill>
-                  <a:srgbClr val="000000"/>
-                </a:solidFill>
-                <a:latin typeface="Times New Roman MT" panose="020B0604020202020204" charset="0"/>
-                <a:ea typeface="Horizon"/>
-                <a:cs typeface="Horizon"/>
-                <a:sym typeface="Horizon"/>
-              </a:rPr>
-              <a:t>                          AES-128 Encryption &amp; Decryption – </a:t>
-            </a:r>
-            <a:r>
-              <a:rPr lang="en-US" sz="3172" dirty="0">
-                <a:solidFill>
-                  <a:srgbClr val="000000"/>
-                </a:solidFill>
-                <a:latin typeface="Times New Roman MT" panose="020B0604020202020204" charset="0"/>
-                <a:ea typeface="Horizon"/>
-                <a:cs typeface="Horizon"/>
-                <a:sym typeface="Horizon"/>
-              </a:rPr>
-              <a:t>Securely encrypts &amp; decrypts 128-bit data</a:t>
-            </a:r>
-            <a:r>
-              <a:rPr lang="en-US" sz="3172" b="1" dirty="0">
-                <a:solidFill>
-                  <a:srgbClr val="000000"/>
-                </a:solidFill>
-                <a:latin typeface="Times New Roman MT" panose="020B0604020202020204" charset="0"/>
-                <a:ea typeface="Horizon"/>
-                <a:cs typeface="Horizon"/>
-                <a:sym typeface="Horizon"/>
-              </a:rPr>
-              <a:t>.</a:t>
-            </a:r>
-          </a:p>
-          <a:p>
-            <a:pPr algn="ctr">
-              <a:lnSpc>
-                <a:spcPts val="4442"/>
-              </a:lnSpc>
+              <a:rPr lang="en-GB" sz="2400" dirty="0">
+                <a:latin typeface="Times New Roman MT" panose="020B0604020202020204" charset="0"/>
+              </a:rPr>
+              <a:t>The design uses only 4.01% LUTs and 0.63% registers, with 0 BRAM and 0 DSP48 slices, making it a pure logic-based implementation.</a:t>
+            </a:r>
+          </a:p>
+          <a:p>
+            <a:r>
+              <a:rPr lang="en-GB" sz="2400" dirty="0">
+                <a:latin typeface="Times New Roman MT" panose="020B0604020202020204" charset="0"/>
+              </a:rPr>
+              <a:t> </a:t>
+            </a:r>
+            <a:r>
+              <a:rPr lang="en-GB" sz="2400" b="1" dirty="0">
+                <a:latin typeface="Times New Roman MT" panose="020B0604020202020204" charset="0"/>
+              </a:rPr>
+              <a:t>Power Consumption</a:t>
+            </a:r>
+          </a:p>
+          <a:p>
+            <a:pPr marL="342900" indent="-342900">
+              <a:buFont typeface="Wingdings" panose="05000000000000000000" pitchFamily="2" charset="2"/>
+              <a:buChar char="Ø"/>
             </a:pPr>
             <a:r>
-              <a:rPr lang="en-US" sz="3172" b="1" dirty="0">
-                <a:solidFill>
-                  <a:srgbClr val="000000"/>
-                </a:solidFill>
-                <a:latin typeface="Times New Roman MT" panose="020B0604020202020204" charset="0"/>
-                <a:ea typeface="Horizon"/>
-                <a:cs typeface="Horizon"/>
-                <a:sym typeface="Horizon"/>
-              </a:rPr>
-              <a:t>       10-Cycle Processing – </a:t>
-            </a:r>
-            <a:r>
-              <a:rPr lang="en-US" sz="3172" dirty="0">
-                <a:solidFill>
-                  <a:srgbClr val="000000"/>
-                </a:solidFill>
-                <a:latin typeface="Times New Roman MT" panose="020B0604020202020204" charset="0"/>
-                <a:ea typeface="Horizon"/>
-                <a:cs typeface="Horizon"/>
-                <a:sym typeface="Horizon"/>
-              </a:rPr>
-              <a:t>Targets one AES block within 10 clock cycles</a:t>
-            </a:r>
-            <a:r>
-              <a:rPr lang="en-US" sz="3172" b="1" dirty="0">
-                <a:solidFill>
-                  <a:srgbClr val="000000"/>
-                </a:solidFill>
-                <a:latin typeface="Times New Roman MT" panose="020B0604020202020204" charset="0"/>
-                <a:ea typeface="Horizon"/>
-                <a:cs typeface="Horizon"/>
-                <a:sym typeface="Horizon"/>
-              </a:rPr>
-              <a:t>.</a:t>
-            </a:r>
-          </a:p>
-          <a:p>
-            <a:pPr algn="ctr">
-              <a:lnSpc>
-                <a:spcPts val="4442"/>
-              </a:lnSpc>
+              <a:rPr lang="en-GB" sz="2400" dirty="0">
+                <a:latin typeface="Times New Roman MT" panose="020B0604020202020204" charset="0"/>
+              </a:rPr>
+              <a:t>The total on-chip power consumption is only 0.199 W (199 </a:t>
+            </a:r>
+            <a:r>
+              <a:rPr lang="en-GB" sz="2400" dirty="0" err="1">
+                <a:latin typeface="Times New Roman MT" panose="020B0604020202020204" charset="0"/>
+              </a:rPr>
+              <a:t>mW</a:t>
+            </a:r>
+            <a:r>
+              <a:rPr lang="en-GB" sz="2400" dirty="0">
+                <a:latin typeface="Times New Roman MT" panose="020B0604020202020204" charset="0"/>
+              </a:rPr>
+              <a:t>)</a:t>
+            </a:r>
+          </a:p>
+          <a:p>
+            <a:r>
+              <a:rPr lang="en-GB" sz="2400" dirty="0">
+                <a:latin typeface="Times New Roman MT" panose="020B0604020202020204" charset="0"/>
+              </a:rPr>
+              <a:t> </a:t>
+            </a:r>
+            <a:r>
+              <a:rPr lang="en-GB" sz="2400" b="1" dirty="0">
+                <a:latin typeface="Times New Roman MT" panose="020B0604020202020204" charset="0"/>
+              </a:rPr>
+              <a:t>Verification and Standards Compliance</a:t>
+            </a:r>
+          </a:p>
+          <a:p>
+            <a:pPr marL="342900" indent="-342900">
+              <a:buFont typeface="Wingdings" panose="05000000000000000000" pitchFamily="2" charset="2"/>
+              <a:buChar char="Ø"/>
             </a:pPr>
             <a:r>
-              <a:rPr lang="en-US" sz="3172" b="1" dirty="0">
-                <a:solidFill>
-                  <a:srgbClr val="000000"/>
-                </a:solidFill>
-                <a:latin typeface="Times New Roman MT" panose="020B0604020202020204" charset="0"/>
-                <a:ea typeface="Horizon"/>
-                <a:cs typeface="Horizon"/>
-                <a:sym typeface="Horizon"/>
-              </a:rPr>
-              <a:t>Low Resource Usage – </a:t>
-            </a:r>
-            <a:r>
-              <a:rPr lang="en-US" sz="3172" dirty="0">
-                <a:solidFill>
-                  <a:srgbClr val="000000"/>
-                </a:solidFill>
-                <a:latin typeface="Times New Roman MT" panose="020B0604020202020204" charset="0"/>
-                <a:ea typeface="Horizon"/>
-                <a:cs typeface="Horizon"/>
-                <a:sym typeface="Horizon"/>
-              </a:rPr>
-              <a:t>Optimized to use less than 1,500 LUTs</a:t>
-            </a:r>
-            <a:r>
-              <a:rPr lang="en-US" sz="3172" b="1" dirty="0">
-                <a:solidFill>
-                  <a:srgbClr val="000000"/>
-                </a:solidFill>
-                <a:latin typeface="Times New Roman MT" panose="020B0604020202020204" charset="0"/>
-                <a:ea typeface="Horizon"/>
-                <a:cs typeface="Horizon"/>
-                <a:sym typeface="Horizon"/>
-              </a:rPr>
-              <a:t>.</a:t>
-            </a:r>
-          </a:p>
-          <a:p>
-            <a:pPr algn="ctr">
-              <a:lnSpc>
-                <a:spcPts val="4442"/>
-              </a:lnSpc>
+              <a:rPr lang="en-GB" sz="2400" dirty="0">
+                <a:latin typeface="Times New Roman MT" panose="020B0604020202020204" charset="0"/>
+              </a:rPr>
+              <a:t>The design achieved 100% PASS in 284 NIST CAVP test vectors and verified all six AES operating modes successfully.</a:t>
+            </a:r>
+          </a:p>
+          <a:p>
+            <a:r>
+              <a:rPr lang="en-GB" sz="2400" b="1" dirty="0">
+                <a:latin typeface="Times New Roman MT" panose="020B0604020202020204" charset="0"/>
+              </a:rPr>
+              <a:t>Security Verification</a:t>
+            </a:r>
+          </a:p>
+          <a:p>
+            <a:pPr marL="342900" indent="-342900">
+              <a:buFont typeface="Wingdings" panose="05000000000000000000" pitchFamily="2" charset="2"/>
+              <a:buChar char="Ø"/>
             </a:pPr>
             <a:r>
-              <a:rPr lang="en-US" sz="3172" b="1" dirty="0">
-                <a:solidFill>
-                  <a:srgbClr val="000000"/>
-                </a:solidFill>
-                <a:latin typeface="Times New Roman MT" panose="020B0604020202020204" charset="0"/>
-                <a:ea typeface="Horizon"/>
-                <a:cs typeface="Horizon"/>
-                <a:sym typeface="Horizon"/>
-              </a:rPr>
-              <a:t>                      Secure AXI-MM Interface – </a:t>
-            </a:r>
-            <a:r>
-              <a:rPr lang="en-US" sz="3172" dirty="0">
-                <a:solidFill>
-                  <a:srgbClr val="000000"/>
-                </a:solidFill>
-                <a:latin typeface="Times New Roman MT" panose="020B0604020202020204" charset="0"/>
-                <a:ea typeface="Horizon"/>
-                <a:cs typeface="Horizon"/>
-                <a:sym typeface="Horizon"/>
-              </a:rPr>
-              <a:t>Enables safe system-level data communication</a:t>
-            </a:r>
-            <a:r>
-              <a:rPr lang="en-US" sz="3172" b="1" dirty="0">
-                <a:solidFill>
-                  <a:srgbClr val="000000"/>
-                </a:solidFill>
-                <a:latin typeface="Times New Roman MT" panose="020B0604020202020204" charset="0"/>
-                <a:ea typeface="Horizon"/>
-                <a:cs typeface="Horizon"/>
-                <a:sym typeface="Horizon"/>
-              </a:rPr>
-              <a:t>.</a:t>
-            </a:r>
-          </a:p>
-          <a:p>
-            <a:pPr algn="ctr">
-              <a:lnSpc>
-                <a:spcPts val="4442"/>
-              </a:lnSpc>
+              <a:rPr lang="en-GB" sz="2400" dirty="0">
+                <a:latin typeface="Times New Roman MT" panose="020B0604020202020204" charset="0"/>
+              </a:rPr>
+              <a:t>The design ensures write-only key protection, gated outputs during BUSY, and no internal state leakage through the AXI bus.</a:t>
+            </a:r>
+          </a:p>
+          <a:p>
+            <a:r>
+              <a:rPr lang="en-GB" sz="2400" dirty="0">
+                <a:latin typeface="Times New Roman MT" panose="020B0604020202020204" charset="0"/>
+              </a:rPr>
+              <a:t> </a:t>
+            </a:r>
+            <a:r>
+              <a:rPr lang="en-GB" sz="2400" b="1" dirty="0">
+                <a:latin typeface="Times New Roman MT" panose="020B0604020202020204" charset="0"/>
+              </a:rPr>
+              <a:t>Hardware Demonstration</a:t>
+            </a:r>
+          </a:p>
+          <a:p>
+            <a:pPr marL="342900" indent="-342900">
+              <a:buFont typeface="Wingdings" panose="05000000000000000000" pitchFamily="2" charset="2"/>
+              <a:buChar char="Ø"/>
             </a:pPr>
             <a:r>
-              <a:rPr lang="en-US" sz="3172" b="1" dirty="0">
-                <a:solidFill>
-                  <a:srgbClr val="000000"/>
-                </a:solidFill>
-                <a:latin typeface="Times New Roman MT" panose="020B0604020202020204" charset="0"/>
-                <a:ea typeface="Horizon"/>
-                <a:cs typeface="Horizon"/>
-                <a:sym typeface="Horizon"/>
-              </a:rPr>
-              <a:t>          No Key Leakage – </a:t>
-            </a:r>
-            <a:r>
-              <a:rPr lang="en-US" sz="3172" dirty="0">
-                <a:solidFill>
-                  <a:srgbClr val="000000"/>
-                </a:solidFill>
-                <a:latin typeface="Times New Roman MT" panose="020B0604020202020204" charset="0"/>
-                <a:ea typeface="Horizon"/>
-                <a:cs typeface="Horizon"/>
-                <a:sym typeface="Horizon"/>
-              </a:rPr>
-              <a:t>Internal keys and cipher states are kept protected</a:t>
-            </a:r>
-            <a:r>
-              <a:rPr lang="en-US" sz="3172" b="1" dirty="0">
-                <a:solidFill>
-                  <a:srgbClr val="000000"/>
-                </a:solidFill>
-                <a:latin typeface="Times New Roman MT" panose="020B0604020202020204" charset="0"/>
-                <a:ea typeface="Horizon"/>
-                <a:cs typeface="Horizon"/>
-                <a:sym typeface="Horizon"/>
-              </a:rPr>
-              <a:t>.</a:t>
-            </a:r>
-          </a:p>
-          <a:p>
-            <a:pPr algn="justLow">
-              <a:lnSpc>
-                <a:spcPts val="4442"/>
-              </a:lnSpc>
-            </a:pPr>
-            <a:r>
-              <a:rPr lang="en-US" sz="3172" b="1" dirty="0">
-                <a:solidFill>
-                  <a:srgbClr val="000000"/>
-                </a:solidFill>
-                <a:latin typeface="Times New Roman MT" panose="020B0604020202020204" charset="0"/>
-                <a:ea typeface="Horizon"/>
-                <a:cs typeface="Horizon"/>
-                <a:sym typeface="Horizon"/>
-              </a:rPr>
-              <a:t>                           FPGA Implementation – </a:t>
-            </a:r>
-            <a:r>
-              <a:rPr lang="en-US" sz="3172" dirty="0">
-                <a:solidFill>
-                  <a:srgbClr val="000000"/>
-                </a:solidFill>
-                <a:latin typeface="Times New Roman MT" panose="020B0604020202020204" charset="0"/>
-                <a:ea typeface="Horizon"/>
-                <a:cs typeface="Horizon"/>
-                <a:sym typeface="Horizon"/>
-              </a:rPr>
-              <a:t>Designed for the Arty S7-50 FPGA board</a:t>
-            </a:r>
-            <a:r>
-              <a:rPr lang="en-US" sz="3172" b="1" dirty="0">
-                <a:solidFill>
-                  <a:srgbClr val="000000"/>
-                </a:solidFill>
-                <a:latin typeface="Times New Roman MT" panose="020B0604020202020204" charset="0"/>
-                <a:ea typeface="Horizon"/>
-                <a:cs typeface="Horizon"/>
-                <a:sym typeface="Horizon"/>
-              </a:rPr>
-              <a:t>. �</a:t>
-            </a:r>
-          </a:p>
-          <a:p>
-            <a:pPr algn="justLow">
-              <a:lnSpc>
-                <a:spcPts val="4442"/>
-              </a:lnSpc>
-            </a:pPr>
-            <a:endParaRPr lang="en-US" sz="3172" b="1" dirty="0">
-              <a:solidFill>
-                <a:srgbClr val="000000"/>
-              </a:solidFill>
-              <a:latin typeface="Times New Roman MT" panose="020B0604020202020204" charset="0"/>
-              <a:ea typeface="Horizon"/>
-              <a:cs typeface="Horizon"/>
-              <a:sym typeface="Horizon"/>
-            </a:endParaRPr>
-          </a:p>
-          <a:p>
-            <a:pPr algn="ctr">
-              <a:lnSpc>
-                <a:spcPts val="4442"/>
-              </a:lnSpc>
-            </a:pPr>
-            <a:endParaRPr lang="en-US" sz="3172" dirty="0">
-              <a:solidFill>
-                <a:srgbClr val="000000"/>
-              </a:solidFill>
-              <a:latin typeface="Horizon"/>
-              <a:ea typeface="Horizon"/>
-              <a:cs typeface="Horizon"/>
-              <a:sym typeface="Horizon"/>
-            </a:endParaRPr>
+              <a:rPr lang="en-GB" sz="2400" dirty="0">
+                <a:latin typeface="Times New Roman MT" panose="020B0604020202020204" charset="0"/>
+              </a:rPr>
+              <a:t>The AES core was demonstrated on the </a:t>
+            </a:r>
+            <a:r>
+              <a:rPr lang="en-GB" sz="2400" dirty="0" err="1">
+                <a:latin typeface="Times New Roman MT" panose="020B0604020202020204" charset="0"/>
+              </a:rPr>
+              <a:t>Digilent</a:t>
+            </a:r>
+            <a:r>
+              <a:rPr lang="en-GB" sz="2400" dirty="0">
+                <a:latin typeface="Times New Roman MT" panose="020B0604020202020204" charset="0"/>
+              </a:rPr>
+              <a:t> </a:t>
+            </a:r>
+            <a:r>
+              <a:rPr lang="en-GB" sz="2400" dirty="0" err="1">
+                <a:latin typeface="Times New Roman MT" panose="020B0604020202020204" charset="0"/>
+              </a:rPr>
+              <a:t>Nexys</a:t>
+            </a:r>
+            <a:r>
+              <a:rPr lang="en-GB" sz="2400" dirty="0">
+                <a:latin typeface="Times New Roman MT" panose="020B0604020202020204" charset="0"/>
+              </a:rPr>
+              <a:t> A7 (XC7A100T) using Python USB-UART streaming, 7-segment display, LEDs, and pushbuttons.</a:t>
+            </a:r>
           </a:p>
         </p:txBody>
       </p:sp>
@@ -7841,8 +7898,8 @@
         </p:nvSpPr>
         <p:spPr>
           <a:xfrm>
-            <a:off x="-2590800" y="3552582"/>
-            <a:ext cx="20878800" cy="8643905"/>
+            <a:off x="457200" y="3552582"/>
+            <a:ext cx="17830800" cy="3309111"/>
           </a:xfrm>
           <a:prstGeom prst="rect">
             <a:avLst/>
@@ -7859,23 +7916,43 @@
                 <a:spcPts val="5152"/>
               </a:lnSpc>
             </a:pPr>
-            <a:r>
-              <a:rPr lang="en-US" sz="3680" dirty="0" err="1">
-                <a:solidFill>
-                  <a:srgbClr val="000000"/>
-                </a:solidFill>
-                <a:latin typeface="Horizon"/>
-                <a:ea typeface="Horizon"/>
-                <a:cs typeface="Horizon"/>
-                <a:sym typeface="Horizon"/>
-              </a:rPr>
-              <a:t>REFerence</a:t>
-            </a:r>
-            <a:endParaRPr lang="en-US" sz="3680" dirty="0">
+            <a:endParaRPr lang="en-US" sz="3680" b="1" dirty="0">
               <a:solidFill>
                 <a:srgbClr val="000000"/>
               </a:solidFill>
-              <a:latin typeface="Horizon"/>
+              <a:latin typeface="Times New Roman MT" panose="020B0604020202020204" charset="0"/>
+              <a:ea typeface="Horizon"/>
+              <a:cs typeface="Horizon"/>
+              <a:sym typeface="Horizon"/>
+            </a:endParaRPr>
+          </a:p>
+          <a:p>
+            <a:pPr algn="ctr">
+              <a:lnSpc>
+                <a:spcPts val="5152"/>
+              </a:lnSpc>
+            </a:pPr>
+            <a:endParaRPr lang="en-US" sz="3680" b="1" dirty="0">
+              <a:solidFill>
+                <a:srgbClr val="000000"/>
+              </a:solidFill>
+              <a:latin typeface="Horizon" panose="020B0604020202020204" charset="0"/>
+              <a:ea typeface="Horizon"/>
+              <a:cs typeface="Horizon"/>
+              <a:sym typeface="Horizon"/>
+            </a:endParaRPr>
+          </a:p>
+          <a:p>
+            <a:pPr algn="ctr">
+              <a:lnSpc>
+                <a:spcPts val="5152"/>
+              </a:lnSpc>
+            </a:pPr>
+            <a:endParaRPr lang="en-US" sz="3680" b="1" dirty="0">
+              <a:solidFill>
+                <a:srgbClr val="000000"/>
+              </a:solidFill>
+              <a:latin typeface="Times New Roman MT" panose="020B0604020202020204" charset="0"/>
               <a:ea typeface="Horizon"/>
               <a:cs typeface="Horizon"/>
               <a:sym typeface="Horizon"/>
@@ -7903,479 +7980,6 @@
                 <a:spcPts val="5152"/>
               </a:lnSpc>
             </a:pPr>
-            <a:r>
-              <a:rPr lang="en-US" sz="3680" b="1" dirty="0">
-                <a:solidFill>
-                  <a:srgbClr val="000000"/>
-                </a:solidFill>
-                <a:latin typeface="Times New Roman MT" panose="020B0604020202020204" charset="0"/>
-                <a:ea typeface="Horizon"/>
-                <a:cs typeface="Horizon"/>
-                <a:sym typeface="Horizon"/>
-              </a:rPr>
-              <a:t>                    FIPS 197 – </a:t>
-            </a:r>
-            <a:r>
-              <a:rPr lang="en-US" sz="3680" dirty="0">
-                <a:solidFill>
-                  <a:srgbClr val="000000"/>
-                </a:solidFill>
-                <a:latin typeface="Times New Roman MT" panose="020B0604020202020204" charset="0"/>
-                <a:ea typeface="Horizon"/>
-                <a:cs typeface="Horizon"/>
-                <a:sym typeface="Horizon"/>
-              </a:rPr>
-              <a:t>Advanced Encryption Standard (AES) - </a:t>
-            </a:r>
-            <a:r>
-              <a:rPr lang="en-US" sz="3680" dirty="0">
-                <a:solidFill>
-                  <a:srgbClr val="000000"/>
-                </a:solidFill>
-                <a:latin typeface="Times New Roman MT" panose="020B0604020202020204" charset="0"/>
-                <a:ea typeface="Horizon"/>
-                <a:cs typeface="Horizon"/>
-                <a:sym typeface="Horizon"/>
-                <a:hlinkClick r:id="rId7"/>
-              </a:rPr>
-              <a:t>https://csrc.nist.gov/#</a:t>
-            </a:r>
-            <a:endParaRPr lang="en-US" sz="3680" dirty="0">
-              <a:solidFill>
-                <a:srgbClr val="000000"/>
-              </a:solidFill>
-              <a:latin typeface="Times New Roman MT" panose="020B0604020202020204" charset="0"/>
-              <a:ea typeface="Horizon"/>
-              <a:cs typeface="Horizon"/>
-              <a:sym typeface="Horizon"/>
-            </a:endParaRPr>
-          </a:p>
-          <a:p>
-            <a:pPr algn="ctr">
-              <a:lnSpc>
-                <a:spcPts val="5152"/>
-              </a:lnSpc>
-            </a:pPr>
-            <a:r>
-              <a:rPr lang="en-US" sz="3680" b="1" dirty="0">
-                <a:solidFill>
-                  <a:srgbClr val="000000"/>
-                </a:solidFill>
-                <a:latin typeface="Times New Roman MT" panose="020B0604020202020204" charset="0"/>
-                <a:ea typeface="Horizon"/>
-                <a:cs typeface="Horizon"/>
-                <a:sym typeface="Horizon"/>
-              </a:rPr>
-              <a:t>                            </a:t>
-            </a:r>
-            <a:r>
-              <a:rPr lang="en-US" sz="3680" b="1" dirty="0" err="1">
-                <a:solidFill>
-                  <a:srgbClr val="000000"/>
-                </a:solidFill>
-                <a:latin typeface="Times New Roman MT" panose="020B0604020202020204" charset="0"/>
-                <a:ea typeface="Horizon"/>
-                <a:cs typeface="Horizon"/>
-                <a:sym typeface="Horizon"/>
-              </a:rPr>
-              <a:t>Vivado</a:t>
-            </a:r>
-            <a:r>
-              <a:rPr lang="en-US" sz="3680" b="1" dirty="0">
-                <a:solidFill>
-                  <a:srgbClr val="000000"/>
-                </a:solidFill>
-                <a:latin typeface="Times New Roman MT" panose="020B0604020202020204" charset="0"/>
-                <a:ea typeface="Horizon"/>
-                <a:cs typeface="Horizon"/>
-                <a:sym typeface="Horizon"/>
-              </a:rPr>
-              <a:t> Design Suite User Guide – </a:t>
-            </a:r>
-            <a:r>
-              <a:rPr lang="fr-FR" sz="3680" dirty="0">
-                <a:solidFill>
-                  <a:srgbClr val="000000"/>
-                </a:solidFill>
-                <a:latin typeface="Times New Roman MT" panose="020B0604020202020204" charset="0"/>
-                <a:ea typeface="Horizon"/>
-                <a:cs typeface="Horizon"/>
-                <a:sym typeface="Horizon"/>
-              </a:rPr>
-              <a:t> </a:t>
-            </a:r>
-            <a:r>
-              <a:rPr lang="fr-FR" sz="3680" dirty="0">
-                <a:solidFill>
-                  <a:srgbClr val="000000"/>
-                </a:solidFill>
-                <a:latin typeface="Times New Roman MT" panose="020B0604020202020204" charset="0"/>
-                <a:ea typeface="Horizon"/>
-                <a:cs typeface="Horizon"/>
-                <a:sym typeface="Horizon"/>
-                <a:hlinkClick r:id="rId8"/>
-              </a:rPr>
-              <a:t>https://share.google/3oxbU1rZyKmIiO8du</a:t>
-            </a:r>
-            <a:endParaRPr lang="fr-FR" sz="3680" dirty="0">
-              <a:solidFill>
-                <a:srgbClr val="000000"/>
-              </a:solidFill>
-              <a:latin typeface="Times New Roman MT" panose="020B0604020202020204" charset="0"/>
-              <a:ea typeface="Horizon"/>
-              <a:cs typeface="Horizon"/>
-              <a:sym typeface="Horizon"/>
-            </a:endParaRPr>
-          </a:p>
-          <a:p>
-            <a:pPr algn="ctr">
-              <a:lnSpc>
-                <a:spcPts val="5152"/>
-              </a:lnSpc>
-            </a:pPr>
-            <a:r>
-              <a:rPr lang="fr-FR" sz="3680" b="1" dirty="0">
-                <a:solidFill>
-                  <a:srgbClr val="000000"/>
-                </a:solidFill>
-                <a:latin typeface="Times New Roman MT" panose="020B0604020202020204" charset="0"/>
-                <a:ea typeface="Horizon"/>
-                <a:cs typeface="Horizon"/>
-                <a:sym typeface="Horizon"/>
-              </a:rPr>
-              <a:t>                                  Advanced </a:t>
-            </a:r>
-            <a:r>
-              <a:rPr lang="fr-FR" sz="3680" b="1" dirty="0" err="1">
-                <a:solidFill>
-                  <a:srgbClr val="000000"/>
-                </a:solidFill>
-                <a:latin typeface="Times New Roman MT" panose="020B0604020202020204" charset="0"/>
-                <a:ea typeface="Horizon"/>
-                <a:cs typeface="Horizon"/>
-                <a:sym typeface="Horizon"/>
-              </a:rPr>
-              <a:t>Encryption</a:t>
-            </a:r>
-            <a:r>
-              <a:rPr lang="fr-FR" sz="3680" b="1" dirty="0">
-                <a:solidFill>
-                  <a:srgbClr val="000000"/>
-                </a:solidFill>
-                <a:latin typeface="Times New Roman MT" panose="020B0604020202020204" charset="0"/>
-                <a:ea typeface="Horizon"/>
-                <a:cs typeface="Horizon"/>
-                <a:sym typeface="Horizon"/>
-              </a:rPr>
-              <a:t> Standard – </a:t>
-            </a:r>
-            <a:r>
-              <a:rPr lang="fr-FR" sz="3680" dirty="0" err="1">
-                <a:solidFill>
-                  <a:srgbClr val="000000"/>
-                </a:solidFill>
-                <a:latin typeface="Times New Roman MT" panose="020B0604020202020204" charset="0"/>
-                <a:ea typeface="Horizon"/>
-                <a:cs typeface="Horizon"/>
-                <a:sym typeface="Horizon"/>
-              </a:rPr>
-              <a:t>Morris.J.Dworkin</a:t>
-            </a:r>
-            <a:r>
-              <a:rPr lang="fr-FR" sz="3680" dirty="0">
-                <a:solidFill>
-                  <a:srgbClr val="000000"/>
-                </a:solidFill>
-                <a:latin typeface="Times New Roman MT" panose="020B0604020202020204" charset="0"/>
-                <a:ea typeface="Horizon"/>
-                <a:cs typeface="Horizon"/>
-                <a:sym typeface="Horizon"/>
-              </a:rPr>
-              <a:t> et al</a:t>
-            </a:r>
-            <a:r>
-              <a:rPr lang="fr-FR" sz="3680">
-                <a:solidFill>
-                  <a:srgbClr val="000000"/>
-                </a:solidFill>
-                <a:latin typeface="Times New Roman MT" panose="020B0604020202020204" charset="0"/>
-                <a:ea typeface="Horizon"/>
-                <a:cs typeface="Horizon"/>
-                <a:sym typeface="Horizon"/>
-              </a:rPr>
-              <a:t>.,- https://csrc.nist.gov/#</a:t>
-            </a:r>
-            <a:endParaRPr lang="en-US" sz="3680" b="1" dirty="0">
-              <a:solidFill>
-                <a:srgbClr val="000000"/>
-              </a:solidFill>
-              <a:latin typeface="Horizon" panose="020B0604020202020204" charset="0"/>
-              <a:ea typeface="Horizon"/>
-              <a:cs typeface="Horizon"/>
-              <a:sym typeface="Horizon"/>
-            </a:endParaRPr>
-          </a:p>
-          <a:p>
-            <a:pPr algn="ctr">
-              <a:lnSpc>
-                <a:spcPts val="5152"/>
-              </a:lnSpc>
-            </a:pPr>
-            <a:r>
-              <a:rPr lang="en-US" sz="3680" b="1" dirty="0">
-                <a:solidFill>
-                  <a:srgbClr val="000000"/>
-                </a:solidFill>
-                <a:latin typeface="Times New Roman MT" panose="020B0604020202020204" charset="0"/>
-                <a:ea typeface="Horizon"/>
-                <a:cs typeface="Horizon"/>
-                <a:sym typeface="Horizon"/>
-              </a:rPr>
-              <a:t>NIST-</a:t>
-            </a:r>
-            <a:r>
-              <a:rPr lang="en-US" sz="3680" dirty="0">
-                <a:solidFill>
-                  <a:srgbClr val="000000"/>
-                </a:solidFill>
-                <a:latin typeface="Times New Roman MT" panose="020B0604020202020204" charset="0"/>
-                <a:ea typeface="Horizon"/>
-                <a:cs typeface="Horizon"/>
-                <a:sym typeface="Horizon"/>
-              </a:rPr>
-              <a:t>Advanced encryption standard - </a:t>
-            </a:r>
-            <a:r>
-              <a:rPr lang="en-US" sz="3680" dirty="0">
-                <a:solidFill>
-                  <a:srgbClr val="000000"/>
-                </a:solidFill>
-                <a:latin typeface="Times New Roman MT" panose="020B0604020202020204" charset="0"/>
-                <a:ea typeface="Horizon"/>
-                <a:cs typeface="Horizon"/>
-                <a:sym typeface="Horizon"/>
-                <a:hlinkClick r:id="rId7"/>
-              </a:rPr>
-              <a:t>https://csrc.nist.gov/#</a:t>
-            </a:r>
-            <a:endParaRPr lang="en-US" sz="3680" dirty="0">
-              <a:solidFill>
-                <a:srgbClr val="000000"/>
-              </a:solidFill>
-              <a:latin typeface="Times New Roman MT" panose="020B0604020202020204" charset="0"/>
-              <a:ea typeface="Horizon"/>
-              <a:cs typeface="Horizon"/>
-              <a:sym typeface="Horizon"/>
-            </a:endParaRPr>
-          </a:p>
-          <a:p>
-            <a:pPr algn="ctr">
-              <a:lnSpc>
-                <a:spcPts val="5152"/>
-              </a:lnSpc>
-            </a:pPr>
-            <a:r>
-              <a:rPr lang="en-US" sz="3680" b="1" dirty="0">
-                <a:solidFill>
-                  <a:srgbClr val="000000"/>
-                </a:solidFill>
-                <a:latin typeface="Times New Roman MT" panose="020B0604020202020204" charset="0"/>
-                <a:ea typeface="Horizon"/>
-                <a:cs typeface="Horizon"/>
-                <a:sym typeface="Horizon"/>
-              </a:rPr>
-              <a:t>                         AMD-</a:t>
-            </a:r>
-            <a:r>
-              <a:rPr lang="en-US" sz="3680" dirty="0" err="1">
-                <a:solidFill>
-                  <a:srgbClr val="000000"/>
-                </a:solidFill>
-                <a:latin typeface="Times New Roman MT" panose="020B0604020202020204" charset="0"/>
-                <a:ea typeface="Horizon"/>
-                <a:cs typeface="Horizon"/>
-                <a:sym typeface="Horizon"/>
-              </a:rPr>
-              <a:t>Vivado</a:t>
-            </a:r>
-            <a:r>
-              <a:rPr lang="en-US" sz="3680" dirty="0">
-                <a:solidFill>
-                  <a:srgbClr val="000000"/>
-                </a:solidFill>
-                <a:latin typeface="Times New Roman MT" panose="020B0604020202020204" charset="0"/>
-                <a:ea typeface="Horizon"/>
-                <a:cs typeface="Horizon"/>
-                <a:sym typeface="Horizon"/>
-              </a:rPr>
-              <a:t> Design (UG900)-</a:t>
-            </a:r>
-            <a:r>
-              <a:rPr lang="fr-FR" sz="3680" dirty="0">
-                <a:solidFill>
-                  <a:srgbClr val="000000"/>
-                </a:solidFill>
-                <a:latin typeface="Times New Roman MT" panose="020B0604020202020204" charset="0"/>
-                <a:ea typeface="Horizon"/>
-                <a:cs typeface="Horizon"/>
-                <a:sym typeface="Horizon"/>
-              </a:rPr>
-              <a:t>  </a:t>
-            </a:r>
-            <a:r>
-              <a:rPr lang="fr-FR" sz="3680" dirty="0">
-                <a:solidFill>
-                  <a:srgbClr val="000000"/>
-                </a:solidFill>
-                <a:latin typeface="Times New Roman MT" panose="020B0604020202020204" charset="0"/>
-                <a:ea typeface="Horizon"/>
-                <a:cs typeface="Horizon"/>
-                <a:sym typeface="Horizon"/>
-                <a:hlinkClick r:id="rId8"/>
-              </a:rPr>
-              <a:t>https://share.google/3oxbU1rZyKmIiO8du</a:t>
-            </a:r>
-            <a:endParaRPr lang="fr-FR" sz="3680" dirty="0">
-              <a:solidFill>
-                <a:srgbClr val="000000"/>
-              </a:solidFill>
-              <a:latin typeface="Times New Roman MT" panose="020B0604020202020204" charset="0"/>
-              <a:ea typeface="Horizon"/>
-              <a:cs typeface="Horizon"/>
-              <a:sym typeface="Horizon"/>
-            </a:endParaRPr>
-          </a:p>
-          <a:p>
-            <a:pPr algn="ctr">
-              <a:lnSpc>
-                <a:spcPts val="5152"/>
-              </a:lnSpc>
-            </a:pPr>
-            <a:r>
-              <a:rPr lang="fr-FR" sz="3680" b="1" dirty="0">
-                <a:solidFill>
-                  <a:srgbClr val="000000"/>
-                </a:solidFill>
-                <a:latin typeface="Times New Roman MT" panose="020B0604020202020204" charset="0"/>
-                <a:ea typeface="Horizon"/>
-                <a:cs typeface="Horizon"/>
-                <a:sym typeface="Horizon"/>
-              </a:rPr>
-              <a:t>                      ARM AMBA AXI-</a:t>
-            </a:r>
-            <a:r>
-              <a:rPr lang="fr-FR" sz="3680" dirty="0">
-                <a:solidFill>
-                  <a:srgbClr val="000000"/>
-                </a:solidFill>
-                <a:latin typeface="Times New Roman MT" panose="020B0604020202020204" charset="0"/>
-                <a:ea typeface="Horizon"/>
-                <a:cs typeface="Horizon"/>
-                <a:sym typeface="Horizon"/>
-              </a:rPr>
-              <a:t>AXI Protocol </a:t>
-            </a:r>
-            <a:r>
-              <a:rPr lang="fr-FR" sz="3680" dirty="0" err="1">
-                <a:solidFill>
-                  <a:srgbClr val="000000"/>
-                </a:solidFill>
-                <a:latin typeface="Times New Roman MT" panose="020B0604020202020204" charset="0"/>
-                <a:ea typeface="Horizon"/>
-                <a:cs typeface="Horizon"/>
-                <a:sym typeface="Horizon"/>
-              </a:rPr>
-              <a:t>Specification</a:t>
-            </a:r>
-            <a:r>
-              <a:rPr lang="fr-FR" sz="3680" dirty="0">
-                <a:solidFill>
-                  <a:srgbClr val="000000"/>
-                </a:solidFill>
-                <a:latin typeface="Times New Roman MT" panose="020B0604020202020204" charset="0"/>
-                <a:ea typeface="Horizon"/>
-                <a:cs typeface="Horizon"/>
-                <a:sym typeface="Horizon"/>
-              </a:rPr>
-              <a:t>- </a:t>
-            </a:r>
-            <a:r>
-              <a:rPr lang="fr-FR" sz="3680" dirty="0">
-                <a:solidFill>
-                  <a:srgbClr val="000000"/>
-                </a:solidFill>
-                <a:latin typeface="Times New Roman MT" panose="020B0604020202020204" charset="0"/>
-                <a:ea typeface="Horizon"/>
-                <a:cs typeface="Horizon"/>
-                <a:sym typeface="Horizon"/>
-                <a:hlinkClick r:id="rId9"/>
-              </a:rPr>
-              <a:t>https://developer.arm.com</a:t>
-            </a:r>
-            <a:endParaRPr lang="fr-FR" sz="3680" dirty="0">
-              <a:solidFill>
-                <a:srgbClr val="000000"/>
-              </a:solidFill>
-              <a:latin typeface="Times New Roman MT" panose="020B0604020202020204" charset="0"/>
-              <a:ea typeface="Horizon"/>
-              <a:cs typeface="Horizon"/>
-              <a:sym typeface="Horizon"/>
-            </a:endParaRPr>
-          </a:p>
-          <a:p>
-            <a:pPr algn="ctr">
-              <a:lnSpc>
-                <a:spcPts val="5152"/>
-              </a:lnSpc>
-            </a:pPr>
-            <a:endParaRPr lang="en-US" sz="3680" b="1" dirty="0">
-              <a:solidFill>
-                <a:srgbClr val="000000"/>
-              </a:solidFill>
-              <a:latin typeface="Times New Roman MT" panose="020B0604020202020204" charset="0"/>
-              <a:ea typeface="Horizon"/>
-              <a:cs typeface="Horizon"/>
-              <a:sym typeface="Horizon"/>
-            </a:endParaRPr>
-          </a:p>
-          <a:p>
-            <a:pPr algn="ctr">
-              <a:lnSpc>
-                <a:spcPts val="5152"/>
-              </a:lnSpc>
-            </a:pPr>
-            <a:endParaRPr lang="en-US" sz="3680" b="1" dirty="0">
-              <a:solidFill>
-                <a:srgbClr val="000000"/>
-              </a:solidFill>
-              <a:latin typeface="Horizon" panose="020B0604020202020204" charset="0"/>
-              <a:ea typeface="Horizon"/>
-              <a:cs typeface="Horizon"/>
-              <a:sym typeface="Horizon"/>
-            </a:endParaRPr>
-          </a:p>
-          <a:p>
-            <a:pPr algn="ctr">
-              <a:lnSpc>
-                <a:spcPts val="5152"/>
-              </a:lnSpc>
-            </a:pPr>
-            <a:endParaRPr lang="en-US" sz="3680" b="1" dirty="0">
-              <a:solidFill>
-                <a:srgbClr val="000000"/>
-              </a:solidFill>
-              <a:latin typeface="Times New Roman MT" panose="020B0604020202020204" charset="0"/>
-              <a:ea typeface="Horizon"/>
-              <a:cs typeface="Horizon"/>
-              <a:sym typeface="Horizon"/>
-            </a:endParaRPr>
-          </a:p>
-          <a:p>
-            <a:pPr algn="ctr">
-              <a:lnSpc>
-                <a:spcPts val="5152"/>
-              </a:lnSpc>
-            </a:pPr>
             <a:endParaRPr lang="en-US" sz="3680" dirty="0">
               <a:solidFill>
                 <a:srgbClr val="000000"/>
@@ -8386,807 +7990,140 @@
               <a:sym typeface="Horizon"/>
             </a:endParaRPr>
           </a:p>
-          <a:p>
-            <a:pPr algn="ctr">
-              <a:lnSpc>
-                <a:spcPts val="5152"/>
-              </a:lnSpc>
-            </a:pPr>
-            <a:endParaRPr lang="en-US" sz="3680" dirty="0">
-              <a:solidFill>
-                <a:srgbClr val="000000"/>
-              </a:solidFill>
-              <a:latin typeface="Horizon"/>
-              <a:ea typeface="Horizon"/>
-              <a:cs typeface="Horizon"/>
-              <a:sym typeface="Horizon"/>
-            </a:endParaRPr>
-          </a:p>
-        </p:txBody>
-      </p:sp>
-    </p:spTree>
-  </p:cSld>
-  <p:clrMapOvr>
-    <a:masterClrMapping/>
-  </p:clrMapOvr>
-</p:sld>
-</file>
-
-<file path=ppt/slides/slide8.xml><?xml version="1.0" encoding="utf-8"?>
-<p:sld xmlns:a="http://schemas.openxmlformats.org/drawingml/2006/main" xmlns:r="http://schemas.openxmlformats.org/officeDocument/2006/relationships" xmlns:p="http://schemas.openxmlformats.org/presentationml/2006/main">
-  <p:cSld>
-    <p:bg>
-      <p:bgPr>
-        <a:solidFill>
-          <a:srgbClr val="D3E5DA"/>
-        </a:solidFill>
-        <a:effectLst/>
-      </p:bgPr>
-    </p:bg>
-    <p:spTree>
-      <p:nvGrpSpPr>
-        <p:cNvPr id="1" name=""/>
-        <p:cNvGrpSpPr/>
-        <p:nvPr/>
-      </p:nvGrpSpPr>
-      <p:grpSpPr>
-        <a:xfrm>
-          <a:off x="0" y="0"/>
-          <a:ext cx="0" cy="0"/>
-          <a:chOff x="0" y="0"/>
-          <a:chExt cx="0" cy="0"/>
-        </a:xfrm>
-      </p:grpSpPr>
-      <p:sp>
-        <p:nvSpPr>
-          <p:cNvPr id="2" name="TextBox 2"/>
+        </p:txBody>
+      </p:sp>
+      <p:sp>
+        <p:nvSpPr>
+          <p:cNvPr id="11" name="TextBox 10">
+            <a:extLst>
+              <a:ext uri="{FF2B5EF4-FFF2-40B4-BE49-F238E27FC236}">
+                <a16:creationId xmlns:a16="http://schemas.microsoft.com/office/drawing/2014/main" id="{DE3D6C63-2169-1235-4C46-0396467BFD6C}"/>
+              </a:ext>
+            </a:extLst>
+          </p:cNvPr>
           <p:cNvSpPr txBox="1"/>
           <p:nvPr/>
         </p:nvSpPr>
         <p:spPr>
           <a:xfrm>
-            <a:off x="11330294" y="3601951"/>
-            <a:ext cx="1739141" cy="1042905"/>
+            <a:off x="762000" y="3026743"/>
+            <a:ext cx="15087600" cy="6124754"/>
           </a:xfrm>
           <a:prstGeom prst="rect">
             <a:avLst/>
           </a:prstGeom>
-        </p:spPr>
-        <p:txBody>
-          <a:bodyPr lIns="0" tIns="0" rIns="0" bIns="0" rtlCol="0" anchor="t">
+          <a:noFill/>
+        </p:spPr>
+        <p:txBody>
+          <a:bodyPr wrap="square" rtlCol="0">
             <a:spAutoFit/>
           </a:bodyPr>
           <a:lstStyle/>
           <a:p>
-            <a:pPr marL="0" lvl="0" indent="0" algn="ctr">
-              <a:lnSpc>
-                <a:spcPts val="7909"/>
-              </a:lnSpc>
-            </a:pPr>
-            <a:endParaRPr/>
-          </a:p>
-        </p:txBody>
-      </p:sp>
-      <p:sp>
-        <p:nvSpPr>
-          <p:cNvPr id="3" name="Freeform 3"/>
-          <p:cNvSpPr/>
-          <p:nvPr/>
-        </p:nvSpPr>
-        <p:spPr>
-          <a:xfrm>
-            <a:off x="4600883" y="-456041"/>
-            <a:ext cx="8641637" cy="2621955"/>
-          </a:xfrm>
-          <a:custGeom>
-            <a:avLst/>
-            <a:gdLst/>
-            <a:ahLst/>
-            <a:cxnLst/>
-            <a:rect l="l" t="t" r="r" b="b"/>
-            <a:pathLst>
-              <a:path w="8641637" h="2621955">
-                <a:moveTo>
-                  <a:pt x="0" y="0"/>
-                </a:moveTo>
-                <a:lnTo>
-                  <a:pt x="8641637" y="0"/>
-                </a:lnTo>
-                <a:lnTo>
-                  <a:pt x="8641637" y="2621955"/>
-                </a:lnTo>
-                <a:lnTo>
-                  <a:pt x="0" y="2621955"/>
-                </a:lnTo>
-                <a:lnTo>
-                  <a:pt x="0" y="0"/>
-                </a:lnTo>
-                <a:close/>
-              </a:path>
-            </a:pathLst>
-          </a:custGeom>
-          <a:blipFill>
-            <a:blip r:embed="rId2"/>
-            <a:stretch>
-              <a:fillRect b="-9862"/>
-            </a:stretch>
-          </a:blipFill>
-        </p:spPr>
-        <p:txBody>
-          <a:bodyPr/>
-          <a:lstStyle/>
-          <a:p>
-            <a:endParaRPr lang="en-GB"/>
-          </a:p>
-        </p:txBody>
-      </p:sp>
-      <p:sp>
-        <p:nvSpPr>
-          <p:cNvPr id="4" name="Freeform 4"/>
-          <p:cNvSpPr/>
-          <p:nvPr/>
-        </p:nvSpPr>
-        <p:spPr>
-          <a:xfrm>
-            <a:off x="-25783" y="9121442"/>
-            <a:ext cx="1165558" cy="1165558"/>
-          </a:xfrm>
-          <a:custGeom>
-            <a:avLst/>
-            <a:gdLst/>
-            <a:ahLst/>
-            <a:cxnLst/>
-            <a:rect l="l" t="t" r="r" b="b"/>
-            <a:pathLst>
-              <a:path w="1165558" h="1165558">
-                <a:moveTo>
-                  <a:pt x="0" y="0"/>
-                </a:moveTo>
-                <a:lnTo>
-                  <a:pt x="1165558" y="0"/>
-                </a:lnTo>
-                <a:lnTo>
-                  <a:pt x="1165558" y="1165558"/>
-                </a:lnTo>
-                <a:lnTo>
-                  <a:pt x="0" y="1165558"/>
-                </a:lnTo>
-                <a:lnTo>
-                  <a:pt x="0" y="0"/>
-                </a:lnTo>
-                <a:close/>
-              </a:path>
-            </a:pathLst>
-          </a:custGeom>
-          <a:blipFill>
-            <a:blip r:embed="rId3"/>
-            <a:stretch>
-              <a:fillRect/>
-            </a:stretch>
-          </a:blipFill>
-        </p:spPr>
-        <p:txBody>
-          <a:bodyPr/>
-          <a:lstStyle/>
-          <a:p>
-            <a:endParaRPr lang="en-GB"/>
-          </a:p>
-        </p:txBody>
-      </p:sp>
-      <p:sp>
-        <p:nvSpPr>
-          <p:cNvPr id="5" name="Freeform 5"/>
-          <p:cNvSpPr/>
-          <p:nvPr/>
-        </p:nvSpPr>
-        <p:spPr>
-          <a:xfrm>
-            <a:off x="8780462" y="968727"/>
-            <a:ext cx="8924116" cy="9318273"/>
-          </a:xfrm>
-          <a:custGeom>
-            <a:avLst/>
-            <a:gdLst/>
-            <a:ahLst/>
-            <a:cxnLst/>
-            <a:rect l="l" t="t" r="r" b="b"/>
-            <a:pathLst>
-              <a:path w="8924116" h="9318273">
-                <a:moveTo>
-                  <a:pt x="0" y="0"/>
-                </a:moveTo>
-                <a:lnTo>
-                  <a:pt x="8924116" y="0"/>
-                </a:lnTo>
-                <a:lnTo>
-                  <a:pt x="8924116" y="9318273"/>
-                </a:lnTo>
-                <a:lnTo>
-                  <a:pt x="0" y="9318273"/>
-                </a:lnTo>
-                <a:lnTo>
-                  <a:pt x="0" y="0"/>
-                </a:lnTo>
-                <a:close/>
-              </a:path>
-            </a:pathLst>
-          </a:custGeom>
-          <a:blipFill>
-            <a:blip>
-              <a:alphaModFix amt="7999"/>
-              <a:extLst>
-                <a:ext uri="{96DAC541-7B7A-43D3-8B79-37D633B846F1}">
-                  <asvg:svgBlip xmlns:asvg="http://schemas.microsoft.com/office/drawing/2016/SVG/main" r:embed="rId4"/>
-                </a:ext>
-              </a:extLst>
-            </a:blip>
-            <a:stretch>
-              <a:fillRect/>
-            </a:stretch>
-          </a:blipFill>
-        </p:spPr>
-        <p:txBody>
-          <a:bodyPr/>
-          <a:lstStyle/>
-          <a:p>
-            <a:endParaRPr lang="en-GB"/>
-          </a:p>
-        </p:txBody>
-      </p:sp>
-      <p:sp>
-        <p:nvSpPr>
-          <p:cNvPr id="6" name="Freeform 6"/>
-          <p:cNvSpPr/>
-          <p:nvPr/>
-        </p:nvSpPr>
-        <p:spPr>
-          <a:xfrm rot="-10800000" flipH="1" flipV="1">
-            <a:off x="16306848" y="7955884"/>
-            <a:ext cx="1981152" cy="2331116"/>
-          </a:xfrm>
-          <a:custGeom>
-            <a:avLst/>
-            <a:gdLst/>
-            <a:ahLst/>
-            <a:cxnLst/>
-            <a:rect l="l" t="t" r="r" b="b"/>
-            <a:pathLst>
-              <a:path w="1981152" h="2331116">
-                <a:moveTo>
-                  <a:pt x="1981152" y="2331116"/>
-                </a:moveTo>
-                <a:lnTo>
-                  <a:pt x="0" y="2331116"/>
-                </a:lnTo>
-                <a:lnTo>
-                  <a:pt x="0" y="0"/>
-                </a:lnTo>
-                <a:lnTo>
-                  <a:pt x="1981152" y="0"/>
-                </a:lnTo>
-                <a:lnTo>
-                  <a:pt x="1981152" y="2331116"/>
-                </a:lnTo>
-                <a:close/>
-              </a:path>
-            </a:pathLst>
-          </a:custGeom>
-          <a:blipFill>
-            <a:blip r:embed="rId5"/>
-            <a:stretch>
-              <a:fillRect/>
-            </a:stretch>
-          </a:blipFill>
-        </p:spPr>
-        <p:txBody>
-          <a:bodyPr/>
-          <a:lstStyle/>
-          <a:p>
-            <a:endParaRPr lang="en-GB"/>
-          </a:p>
-        </p:txBody>
-      </p:sp>
-      <p:sp>
-        <p:nvSpPr>
-          <p:cNvPr id="7" name="Freeform 7"/>
-          <p:cNvSpPr/>
-          <p:nvPr/>
-        </p:nvSpPr>
-        <p:spPr>
-          <a:xfrm flipH="1" flipV="1">
-            <a:off x="12341" y="-112715"/>
-            <a:ext cx="1981152" cy="2331116"/>
-          </a:xfrm>
-          <a:custGeom>
-            <a:avLst/>
-            <a:gdLst/>
-            <a:ahLst/>
-            <a:cxnLst/>
-            <a:rect l="l" t="t" r="r" b="b"/>
-            <a:pathLst>
-              <a:path w="1981152" h="2331116">
-                <a:moveTo>
-                  <a:pt x="1981152" y="2331117"/>
-                </a:moveTo>
-                <a:lnTo>
-                  <a:pt x="0" y="2331117"/>
-                </a:lnTo>
-                <a:lnTo>
-                  <a:pt x="0" y="0"/>
-                </a:lnTo>
-                <a:lnTo>
-                  <a:pt x="1981152" y="0"/>
-                </a:lnTo>
-                <a:lnTo>
-                  <a:pt x="1981152" y="2331117"/>
-                </a:lnTo>
-                <a:close/>
-              </a:path>
-            </a:pathLst>
-          </a:custGeom>
-          <a:blipFill>
-            <a:blip r:embed="rId5"/>
-            <a:stretch>
-              <a:fillRect/>
-            </a:stretch>
-          </a:blipFill>
-        </p:spPr>
-        <p:txBody>
-          <a:bodyPr/>
-          <a:lstStyle/>
-          <a:p>
-            <a:endParaRPr lang="en-GB"/>
-          </a:p>
-        </p:txBody>
-      </p:sp>
-      <p:sp>
-        <p:nvSpPr>
-          <p:cNvPr id="8" name="Freeform 8"/>
-          <p:cNvSpPr/>
-          <p:nvPr/>
-        </p:nvSpPr>
-        <p:spPr>
-          <a:xfrm>
-            <a:off x="16835744" y="146866"/>
-            <a:ext cx="1204458" cy="1416140"/>
-          </a:xfrm>
-          <a:custGeom>
-            <a:avLst/>
-            <a:gdLst/>
-            <a:ahLst/>
-            <a:cxnLst/>
-            <a:rect l="l" t="t" r="r" b="b"/>
-            <a:pathLst>
-              <a:path w="1204458" h="1416140">
-                <a:moveTo>
-                  <a:pt x="0" y="0"/>
-                </a:moveTo>
-                <a:lnTo>
-                  <a:pt x="1204458" y="0"/>
-                </a:lnTo>
-                <a:lnTo>
-                  <a:pt x="1204458" y="1416140"/>
-                </a:lnTo>
-                <a:lnTo>
-                  <a:pt x="0" y="1416140"/>
-                </a:lnTo>
-                <a:lnTo>
-                  <a:pt x="0" y="0"/>
-                </a:lnTo>
-                <a:close/>
-              </a:path>
-            </a:pathLst>
-          </a:custGeom>
-          <a:blipFill>
-            <a:blip r:embed="rId6"/>
-            <a:stretch>
-              <a:fillRect l="-133723" t="-76170" r="-689472" b="-85561"/>
-            </a:stretch>
-          </a:blipFill>
-        </p:spPr>
-        <p:txBody>
-          <a:bodyPr/>
-          <a:lstStyle/>
-          <a:p>
-            <a:endParaRPr lang="en-GB"/>
-          </a:p>
-        </p:txBody>
-      </p:sp>
-      <p:sp>
-        <p:nvSpPr>
-          <p:cNvPr id="9" name="Freeform 9"/>
-          <p:cNvSpPr/>
-          <p:nvPr/>
-        </p:nvSpPr>
-        <p:spPr>
-          <a:xfrm>
-            <a:off x="480231" y="2075011"/>
-            <a:ext cx="17559971" cy="6332565"/>
-          </a:xfrm>
-          <a:custGeom>
-            <a:avLst/>
-            <a:gdLst/>
-            <a:ahLst/>
-            <a:cxnLst/>
-            <a:rect l="l" t="t" r="r" b="b"/>
-            <a:pathLst>
-              <a:path w="17559971" h="6332565">
-                <a:moveTo>
-                  <a:pt x="0" y="0"/>
-                </a:moveTo>
-                <a:lnTo>
-                  <a:pt x="17559971" y="0"/>
-                </a:lnTo>
-                <a:lnTo>
-                  <a:pt x="17559971" y="6332564"/>
-                </a:lnTo>
-                <a:lnTo>
-                  <a:pt x="0" y="6332564"/>
-                </a:lnTo>
-                <a:lnTo>
-                  <a:pt x="0" y="0"/>
-                </a:lnTo>
-                <a:close/>
-              </a:path>
-            </a:pathLst>
-          </a:custGeom>
-          <a:blipFill>
-            <a:blip r:embed="rId7"/>
-            <a:stretch>
-              <a:fillRect/>
-            </a:stretch>
-          </a:blipFill>
-        </p:spPr>
-        <p:txBody>
-          <a:bodyPr/>
-          <a:lstStyle/>
-          <a:p>
-            <a:endParaRPr lang="en-GB"/>
-          </a:p>
-        </p:txBody>
-      </p:sp>
-      <p:sp>
-        <p:nvSpPr>
-          <p:cNvPr id="10" name="TextBox 10"/>
-          <p:cNvSpPr txBox="1"/>
-          <p:nvPr/>
-        </p:nvSpPr>
-        <p:spPr>
-          <a:xfrm>
-            <a:off x="5218565" y="3601951"/>
-            <a:ext cx="1739141" cy="1042905"/>
-          </a:xfrm>
-          <a:prstGeom prst="rect">
-            <a:avLst/>
-          </a:prstGeom>
-        </p:spPr>
-        <p:txBody>
-          <a:bodyPr lIns="0" tIns="0" rIns="0" bIns="0" rtlCol="0" anchor="t">
-            <a:spAutoFit/>
-          </a:bodyPr>
-          <a:lstStyle/>
-          <a:p>
-            <a:pPr marL="0" lvl="0" indent="0" algn="ctr">
-              <a:lnSpc>
-                <a:spcPts val="7909"/>
-              </a:lnSpc>
-            </a:pPr>
-            <a:endParaRPr/>
-          </a:p>
-        </p:txBody>
-      </p:sp>
-      <p:sp>
-        <p:nvSpPr>
-          <p:cNvPr id="11" name="TextBox 11"/>
-          <p:cNvSpPr txBox="1"/>
-          <p:nvPr/>
-        </p:nvSpPr>
-        <p:spPr>
-          <a:xfrm>
-            <a:off x="873036" y="2611531"/>
-            <a:ext cx="17167166" cy="5381309"/>
-          </a:xfrm>
-          <a:prstGeom prst="rect">
-            <a:avLst/>
-          </a:prstGeom>
-        </p:spPr>
-        <p:txBody>
-          <a:bodyPr lIns="0" tIns="0" rIns="0" bIns="0" rtlCol="0" anchor="t">
-            <a:spAutoFit/>
-          </a:bodyPr>
-          <a:lstStyle/>
-          <a:p>
-            <a:pPr algn="ctr">
-              <a:lnSpc>
-                <a:spcPts val="2384"/>
-              </a:lnSpc>
-              <a:spcBef>
-                <a:spcPct val="0"/>
-              </a:spcBef>
-            </a:pPr>
-            <a:r>
-              <a:rPr lang="en-US" sz="2187" b="1">
-                <a:solidFill>
-                  <a:srgbClr val="000000"/>
-                </a:solidFill>
-                <a:latin typeface="TS Qamus Bold"/>
-                <a:ea typeface="TS Qamus Bold"/>
-                <a:cs typeface="TS Qamus Bold"/>
-                <a:sym typeface="TS Qamus Bold"/>
-              </a:rPr>
-              <a:t>1.NO SLIDES SHOULD BE REUSED EXCEPT THE OUTPUT AND RESULT SLIDE (SLIDE 6) </a:t>
-            </a:r>
-          </a:p>
-          <a:p>
-            <a:pPr algn="ctr">
-              <a:lnSpc>
-                <a:spcPts val="2384"/>
-              </a:lnSpc>
-              <a:spcBef>
-                <a:spcPct val="0"/>
-              </a:spcBef>
-            </a:pPr>
-            <a:r>
-              <a:rPr lang="en-US" sz="2187" b="1">
-                <a:solidFill>
-                  <a:srgbClr val="000000"/>
-                </a:solidFill>
-                <a:latin typeface="TS Qamus Bold"/>
-                <a:ea typeface="TS Qamus Bold"/>
-                <a:cs typeface="TS Qamus Bold"/>
-                <a:sym typeface="TS Qamus Bold"/>
-              </a:rPr>
-              <a:t>NOTE: MAXIMUM OF 10 SLIDES (NOT MORE THAN THAT)</a:t>
-            </a:r>
-          </a:p>
-          <a:p>
-            <a:pPr algn="ctr">
-              <a:lnSpc>
-                <a:spcPts val="2384"/>
-              </a:lnSpc>
-              <a:spcBef>
-                <a:spcPct val="0"/>
-              </a:spcBef>
-            </a:pPr>
-            <a:endParaRPr lang="en-US" sz="2187" b="1">
-              <a:solidFill>
-                <a:srgbClr val="000000"/>
-              </a:solidFill>
-              <a:latin typeface="TS Qamus Bold"/>
-              <a:ea typeface="TS Qamus Bold"/>
-              <a:cs typeface="TS Qamus Bold"/>
-              <a:sym typeface="TS Qamus Bold"/>
+            <a:r>
+              <a:rPr lang="en-GB" sz="2800" dirty="0">
+                <a:latin typeface="Horizon" panose="020B0604020202020204" charset="0"/>
+              </a:rPr>
+              <a:t>References</a:t>
+            </a:r>
+          </a:p>
+          <a:p>
+            <a:endParaRPr lang="en-GB" sz="2800" dirty="0">
+              <a:latin typeface="Times New Roman MT" panose="020B0604020202020204" charset="0"/>
             </a:endParaRPr>
           </a:p>
           <a:p>
-            <a:pPr marL="472383" lvl="1" indent="-236192" algn="l">
-              <a:lnSpc>
-                <a:spcPts val="2384"/>
-              </a:lnSpc>
-              <a:spcBef>
-                <a:spcPct val="0"/>
-              </a:spcBef>
-              <a:buAutoNum type="arabicPeriod"/>
-            </a:pPr>
-            <a:r>
-              <a:rPr lang="en-US" sz="2187" b="1">
-                <a:solidFill>
-                  <a:srgbClr val="000000"/>
-                </a:solidFill>
-                <a:latin typeface="TS Qamus Bold"/>
-                <a:ea typeface="TS Qamus Bold"/>
-                <a:cs typeface="TS Qamus Bold"/>
-                <a:sym typeface="TS Qamus Bold"/>
-              </a:rPr>
-              <a:t>TRY TO EXPLAIN THE CONTENT IN PROBLEM STATEMENT SLIDE 2 AND THE SOLUTION SLIDE 3 IN A NEAT BULLET POINTS  AND TRY TO KEEP REST OF PRESENTATIONS WITH MINIMAL TEXT </a:t>
-            </a:r>
-          </a:p>
-          <a:p>
-            <a:pPr algn="l">
-              <a:lnSpc>
-                <a:spcPts val="2384"/>
-              </a:lnSpc>
-              <a:spcBef>
-                <a:spcPct val="0"/>
-              </a:spcBef>
-            </a:pPr>
-            <a:endParaRPr lang="en-US" sz="2187" b="1">
-              <a:solidFill>
-                <a:srgbClr val="000000"/>
-              </a:solidFill>
-              <a:latin typeface="TS Qamus Bold"/>
-              <a:ea typeface="TS Qamus Bold"/>
-              <a:cs typeface="TS Qamus Bold"/>
-              <a:sym typeface="TS Qamus Bold"/>
-            </a:endParaRPr>
-          </a:p>
-          <a:p>
-            <a:pPr algn="ctr">
-              <a:lnSpc>
-                <a:spcPts val="2384"/>
-              </a:lnSpc>
-              <a:spcBef>
-                <a:spcPct val="0"/>
-              </a:spcBef>
-            </a:pPr>
-            <a:r>
-              <a:rPr lang="en-US" sz="2187" b="1">
-                <a:solidFill>
-                  <a:srgbClr val="000000"/>
-                </a:solidFill>
-                <a:latin typeface="TS Qamus Bold"/>
-                <a:ea typeface="TS Qamus Bold"/>
-                <a:cs typeface="TS Qamus Bold"/>
-                <a:sym typeface="TS Qamus Bold"/>
-              </a:rPr>
-              <a:t>3.KEEP YOUR EXPLANATION PRECISE AND EASY TO UNDERSTAND</a:t>
-            </a:r>
-          </a:p>
-          <a:p>
-            <a:pPr algn="ctr">
-              <a:lnSpc>
-                <a:spcPts val="2384"/>
-              </a:lnSpc>
-              <a:spcBef>
-                <a:spcPct val="0"/>
-              </a:spcBef>
-            </a:pPr>
-            <a:endParaRPr lang="en-US" sz="2187" b="1">
-              <a:solidFill>
-                <a:srgbClr val="000000"/>
-              </a:solidFill>
-              <a:latin typeface="TS Qamus Bold"/>
-              <a:ea typeface="TS Qamus Bold"/>
-              <a:cs typeface="TS Qamus Bold"/>
-              <a:sym typeface="TS Qamus Bold"/>
-            </a:endParaRPr>
-          </a:p>
-          <a:p>
-            <a:pPr algn="ctr">
-              <a:lnSpc>
-                <a:spcPts val="2384"/>
-              </a:lnSpc>
-              <a:spcBef>
-                <a:spcPct val="0"/>
-              </a:spcBef>
-            </a:pPr>
-            <a:r>
-              <a:rPr lang="en-US" sz="2187" b="1">
-                <a:solidFill>
-                  <a:srgbClr val="000000"/>
-                </a:solidFill>
-                <a:latin typeface="TS Qamus Bold"/>
-                <a:ea typeface="TS Qamus Bold"/>
-                <a:cs typeface="TS Qamus Bold"/>
-                <a:sym typeface="TS Qamus Bold"/>
-              </a:rPr>
-              <a:t>4.IDEA SHOULD BE UNIQUE AND NOVEL. </a:t>
-            </a:r>
-          </a:p>
-          <a:p>
-            <a:pPr algn="ctr">
-              <a:lnSpc>
-                <a:spcPts val="2384"/>
-              </a:lnSpc>
-              <a:spcBef>
-                <a:spcPct val="0"/>
-              </a:spcBef>
-            </a:pPr>
-            <a:endParaRPr lang="en-US" sz="2187" b="1">
-              <a:solidFill>
-                <a:srgbClr val="000000"/>
-              </a:solidFill>
-              <a:latin typeface="TS Qamus Bold"/>
-              <a:ea typeface="TS Qamus Bold"/>
-              <a:cs typeface="TS Qamus Bold"/>
-              <a:sym typeface="TS Qamus Bold"/>
-            </a:endParaRPr>
-          </a:p>
-          <a:p>
-            <a:pPr algn="ctr">
-              <a:lnSpc>
-                <a:spcPts val="2384"/>
-              </a:lnSpc>
-              <a:spcBef>
-                <a:spcPct val="0"/>
-              </a:spcBef>
-            </a:pPr>
-            <a:r>
-              <a:rPr lang="en-US" sz="2187" b="1">
-                <a:solidFill>
-                  <a:srgbClr val="000000"/>
-                </a:solidFill>
-                <a:latin typeface="TS Qamus Bold"/>
-                <a:ea typeface="TS Qamus Bold"/>
-                <a:cs typeface="TS Qamus Bold"/>
-                <a:sym typeface="TS Qamus Bold"/>
-              </a:rPr>
-              <a:t>5.YOU CAN ONLY USE PROVIDED TEMPLATE FOR MAKING THE PPT WITHOUT CHANGING THE IDEA DETAILS POINTERS (MENTIONED IN PREVIOUS SLIDES).</a:t>
-            </a:r>
-          </a:p>
-          <a:p>
-            <a:pPr algn="ctr">
-              <a:lnSpc>
-                <a:spcPts val="2384"/>
-              </a:lnSpc>
-              <a:spcBef>
-                <a:spcPct val="0"/>
-              </a:spcBef>
-            </a:pPr>
-            <a:endParaRPr lang="en-US" sz="2187" b="1">
-              <a:solidFill>
-                <a:srgbClr val="000000"/>
-              </a:solidFill>
-              <a:latin typeface="TS Qamus Bold"/>
-              <a:ea typeface="TS Qamus Bold"/>
-              <a:cs typeface="TS Qamus Bold"/>
-              <a:sym typeface="TS Qamus Bold"/>
-            </a:endParaRPr>
-          </a:p>
-          <a:p>
-            <a:pPr algn="ctr">
-              <a:lnSpc>
-                <a:spcPts val="2384"/>
-              </a:lnSpc>
-              <a:spcBef>
-                <a:spcPct val="0"/>
-              </a:spcBef>
-            </a:pPr>
-            <a:r>
-              <a:rPr lang="en-US" sz="2187" b="1">
-                <a:solidFill>
-                  <a:srgbClr val="000000"/>
-                </a:solidFill>
-                <a:latin typeface="TS Qamus Bold"/>
-                <a:ea typeface="TS Qamus Bold"/>
-                <a:cs typeface="TS Qamus Bold"/>
-                <a:sym typeface="TS Qamus Bold"/>
-              </a:rPr>
-              <a:t>6.YOU NEED TO SAVE THE FILE IN PDF AND UPLOAD THE SAME ON GITHUB . WORD DOC OR ANY OTHER FORMAT WILL BE SUPPORTED </a:t>
-            </a:r>
-          </a:p>
-          <a:p>
-            <a:pPr algn="ctr">
-              <a:lnSpc>
-                <a:spcPts val="2384"/>
-              </a:lnSpc>
-              <a:spcBef>
-                <a:spcPct val="0"/>
-              </a:spcBef>
-            </a:pPr>
-            <a:r>
-              <a:rPr lang="en-US" sz="2187" b="1">
-                <a:solidFill>
-                  <a:srgbClr val="000000"/>
-                </a:solidFill>
-                <a:latin typeface="TS Qamus Bold"/>
-                <a:ea typeface="TS Qamus Bold"/>
-                <a:cs typeface="TS Qamus Bold"/>
-                <a:sym typeface="TS Qamus Bold"/>
-              </a:rPr>
+            <a:r>
+              <a:rPr lang="en-GB" sz="2800" b="1" dirty="0">
+                <a:latin typeface="Times New Roman MT" panose="020B0604020202020204" charset="0"/>
+              </a:rPr>
+              <a:t>NIST FIPS 197: </a:t>
+            </a:r>
+            <a:r>
+              <a:rPr lang="en-GB" sz="2800" dirty="0">
+                <a:latin typeface="Times New Roman MT" panose="020B0604020202020204" charset="0"/>
+              </a:rPr>
+              <a:t>Advanced Encryption Standard (AES) — National Institute of Standards and Technology.</a:t>
+            </a:r>
+          </a:p>
+          <a:p>
+            <a:r>
+              <a:rPr lang="en-GB" sz="2800" b="1" dirty="0">
+                <a:latin typeface="Times New Roman MT" panose="020B0604020202020204" charset="0"/>
+              </a:rPr>
+              <a:t>NIST SP 800-38A: </a:t>
+            </a:r>
+            <a:r>
+              <a:rPr lang="en-GB" sz="2800" dirty="0">
+                <a:latin typeface="Times New Roman MT" panose="020B0604020202020204" charset="0"/>
+              </a:rPr>
+              <a:t>Recommendation for Block Cipher Modes of Operation (ECB, CBC, OFB, CFB, CTR).</a:t>
+            </a:r>
+          </a:p>
+          <a:p>
+            <a:r>
+              <a:rPr lang="en-GB" sz="2800" b="1" dirty="0">
+                <a:latin typeface="Times New Roman MT" panose="020B0604020202020204" charset="0"/>
+              </a:rPr>
+              <a:t>NIST SP 800-38D: </a:t>
+            </a:r>
+            <a:r>
+              <a:rPr lang="en-GB" sz="2800" dirty="0">
+                <a:latin typeface="Times New Roman MT" panose="020B0604020202020204" charset="0"/>
+              </a:rPr>
+              <a:t>Recommendation for Block Cipher Modes of Operation: Galois/Counter Mode (GCM) and GMAC.</a:t>
+            </a:r>
+          </a:p>
+          <a:p>
+            <a:r>
+              <a:rPr lang="en-GB" sz="2800" b="1" dirty="0">
+                <a:latin typeface="Times New Roman MT" panose="020B0604020202020204" charset="0"/>
+              </a:rPr>
+              <a:t>RFC 2898 / RFC 5652: PKCS #5: </a:t>
+            </a:r>
+            <a:r>
+              <a:rPr lang="en-GB" sz="2800" dirty="0">
+                <a:latin typeface="Times New Roman MT" panose="020B0604020202020204" charset="0"/>
+              </a:rPr>
+              <a:t>Password-Based Cryptography / PKCS #7: Cryptographic Message Syntax (Padding).</a:t>
+            </a:r>
+          </a:p>
+          <a:p>
+            <a:r>
+              <a:rPr lang="en-GB" sz="2800" b="1" dirty="0">
+                <a:latin typeface="Times New Roman MT" panose="020B0604020202020204" charset="0"/>
+              </a:rPr>
+              <a:t>ARM AMBA® AXI and ACE Protocol Specification: </a:t>
+            </a:r>
+            <a:r>
+              <a:rPr lang="en-GB" sz="2800" dirty="0">
+                <a:latin typeface="Times New Roman MT" panose="020B0604020202020204" charset="0"/>
+              </a:rPr>
+              <a:t>AXI4 Memory-Mapped Protocol (ARM IHI 0022E).</a:t>
+            </a:r>
+          </a:p>
+          <a:p>
+            <a:r>
+              <a:rPr lang="en-GB" sz="2800" b="1" dirty="0">
+                <a:latin typeface="Times New Roman MT" panose="020B0604020202020204" charset="0"/>
+              </a:rPr>
+              <a:t>AMD / Xilinx UG900 &amp; UG902: </a:t>
+            </a:r>
+            <a:r>
+              <a:rPr lang="en-GB" sz="2800" dirty="0" err="1">
+                <a:latin typeface="Times New Roman MT" panose="020B0604020202020204" charset="0"/>
+              </a:rPr>
+              <a:t>Vivado</a:t>
+            </a:r>
+            <a:r>
+              <a:rPr lang="en-GB" sz="2800" dirty="0">
+                <a:latin typeface="Times New Roman MT" panose="020B0604020202020204" charset="0"/>
+              </a:rPr>
+              <a:t> Design Suite User Guide: Logic Simulation, Synthesis, and Implementation</a:t>
+            </a:r>
+            <a:r>
+              <a:rPr lang="en-GB" dirty="0"/>
               <a:t>.</a:t>
-            </a:r>
-          </a:p>
-          <a:p>
-            <a:pPr algn="ctr">
-              <a:lnSpc>
-                <a:spcPts val="2384"/>
-              </a:lnSpc>
-              <a:spcBef>
-                <a:spcPct val="0"/>
-              </a:spcBef>
-            </a:pPr>
-            <a:r>
-              <a:rPr lang="en-US" sz="2187" b="1">
-                <a:solidFill>
-                  <a:srgbClr val="000000"/>
-                </a:solidFill>
-                <a:latin typeface="TS Qamus Bold"/>
-                <a:ea typeface="TS Qamus Bold"/>
-                <a:cs typeface="TS Qamus Bold"/>
-                <a:sym typeface="TS Qamus Bold"/>
-              </a:rPr>
-              <a:t>NOTE - YOU CAN DELETE THIS SLIDE (IMPORTANT POINTERS) WHEN YOU UPLOAD THE DETAILS OF YOUR IDEA ON GITHUB.</a:t>
             </a:r>
           </a:p>
         </p:txBody>
